--- a/exports/pptx/lessons/senior-module-07-eleven-multiplication/day-07-limits-of-the-method.pptx
+++ b/exports/pptx/lessons/senior-module-07-eleven-multiplication/day-07-limits-of-the-method.pptx
@@ -3626,7 +3626,7 @@
         <p:spPr>
           <a:xfrm>
             <a:off x="634901" y="883593"/>
-            <a:ext cx="8102798" cy="1462683"/>
+            <a:ext cx="8102798" cy="487561"/>
           </a:xfrm>
           <a:prstGeom prst="rect">
             <a:avLst/>
@@ -3657,7 +3657,7 @@
                 <a:ea typeface="Georgia" pitchFamily="34" charset="-122"/>
                 <a:cs typeface="Georgia" pitchFamily="34" charset="-120"/>
               </a:rPr>
-              <a:t>State the observable phenomenon first.</a:t>
+              <a:t>Pose the question.</a:t>
             </a:r>
             <a:pPr algn="l" indent="0" marL="0">
               <a:lnSpc>
@@ -3677,10 +3677,52 @@
                 <a:ea typeface="Georgia" pitchFamily="34" charset="-122"/>
                 <a:cs typeface="Georgia" pitchFamily="34" charset="-120"/>
               </a:rPr>
-              <a:t> Whatever the day's idea is — a number trick, a celestial pattern, a herb's identifying feature — start with the thing students can see, hear, or do.</a:t>
+              <a:t> </a:t>
+            </a:r>
+            <a:pPr algn="l" indent="0" marL="0">
+              <a:lnSpc>
+                <a:spcPts val="1620"/>
+              </a:lnSpc>
+              <a:spcAft>
+                <a:spcPts val="300"/>
+              </a:spcAft>
+              <a:buNone/>
+            </a:pPr>
+            <a:r>
+              <a:rPr lang="en-US" sz="1200" i="1" dirty="0">
+                <a:solidFill>
+                  <a:srgbClr val="1A1A1A"/>
+                </a:solidFill>
+                <a:latin typeface="Georgia" pitchFamily="34" charset="0"/>
+                <a:ea typeface="Georgia" pitchFamily="34" charset="-122"/>
+                <a:cs typeface="Georgia" pitchFamily="34" charset="-120"/>
+              </a:rPr>
+              <a:t>"When IS the ×11 (or near-base) method genuinely faster than traditional long multiplication? When is it the SAME or SLOWER?"</a:t>
             </a:r>
             <a:endParaRPr lang="en-US" sz="1200" dirty="0"/>
           </a:p>
+        </p:txBody>
+      </p:sp>
+      <p:sp>
+        <p:nvSpPr>
+          <p:cNvPr id="5" name="Text 3"/>
+          <p:cNvSpPr/>
+          <p:nvPr/>
+        </p:nvSpPr>
+        <p:spPr>
+          <a:xfrm>
+            <a:off x="634901" y="1472654"/>
+            <a:ext cx="8102798" cy="281880"/>
+          </a:xfrm>
+          <a:prstGeom prst="rect">
+            <a:avLst/>
+          </a:prstGeom>
+          <a:noFill/>
+          <a:ln/>
+        </p:spPr>
+        <p:txBody>
+          <a:bodyPr wrap="square" lIns="0" tIns="0" rIns="0" bIns="0" rtlCol="0" anchor="t"/>
+          <a:lstStyle/>
           <a:p>
             <a:pPr algn="l" marL="342900" indent="-342900">
               <a:lnSpc>
@@ -3701,12 +3743,40 @@
                 <a:ea typeface="Georgia" pitchFamily="34" charset="-122"/>
                 <a:cs typeface="Georgia" pitchFamily="34" charset="-120"/>
               </a:rPr>
-              <a:t>Introduce the Sanskrit term.</a:t>
-            </a:r>
-            <a:pPr algn="l" indent="0" marL="0">
-              <a:lnSpc>
-                <a:spcPts val="1620"/>
-              </a:lnSpc>
+              <a:t>Categorise problem types.</a:t>
+            </a:r>
+            <a:endParaRPr lang="en-US" sz="1200" dirty="0"/>
+          </a:p>
+        </p:txBody>
+      </p:sp>
+      <p:sp>
+        <p:nvSpPr>
+          <p:cNvPr id="6" name="Text 4"/>
+          <p:cNvSpPr/>
+          <p:nvPr/>
+        </p:nvSpPr>
+        <p:spPr>
+          <a:xfrm>
+            <a:off x="406301" y="1843385"/>
+            <a:ext cx="8498026" cy="426541"/>
+          </a:xfrm>
+          <a:prstGeom prst="rect">
+            <a:avLst/>
+          </a:prstGeom>
+          <a:noFill/>
+          <a:ln/>
+        </p:spPr>
+        <p:txBody>
+          <a:bodyPr wrap="square" lIns="0" tIns="0" rIns="0" bIns="0" rtlCol="0" anchor="t"/>
+          <a:lstStyle/>
+          <a:p>
+            <a:pPr algn="l" indent="0" marL="0">
+              <a:lnSpc>
+                <a:spcPts val="1680"/>
+              </a:lnSpc>
+              <a:spcBef>
+                <a:spcPts val="300"/>
+              </a:spcBef>
               <a:spcAft>
                 <a:spcPts val="300"/>
               </a:spcAft>
@@ -3721,10 +3791,32 @@
                 <a:ea typeface="Georgia" pitchFamily="34" charset="-122"/>
                 <a:cs typeface="Georgia" pitchFamily="34" charset="-120"/>
               </a:rPr>
-              <a:t> Once, in the triple format, then italicised only.</a:t>
+              <a:t>– 2-digit × 11 — much faster.    – 3-digit × 11 — somewhat faster.    – 2-digit × 12–19 — comparable.    – 2-digit × 23 (far from base) — long multiplication is faster.    – Long multi-digit products — long multiplication or scientific notation is best.</a:t>
             </a:r>
             <a:endParaRPr lang="en-US" sz="1200" dirty="0"/>
           </a:p>
+        </p:txBody>
+      </p:sp>
+      <p:sp>
+        <p:nvSpPr>
+          <p:cNvPr id="7" name="Text 5"/>
+          <p:cNvSpPr/>
+          <p:nvPr/>
+        </p:nvSpPr>
+        <p:spPr>
+          <a:xfrm>
+            <a:off x="634901" y="2358777"/>
+            <a:ext cx="8102798" cy="487561"/>
+          </a:xfrm>
+          <a:prstGeom prst="rect">
+            <a:avLst/>
+          </a:prstGeom>
+          <a:noFill/>
+          <a:ln/>
+        </p:spPr>
+        <p:txBody>
+          <a:bodyPr wrap="square" lIns="0" tIns="0" rIns="0" bIns="0" rtlCol="0" anchor="t"/>
+          <a:lstStyle/>
           <a:p>
             <a:pPr algn="l" marL="342900" indent="-342900">
               <a:lnSpc>
@@ -3745,7 +3837,7 @@
                 <a:ea typeface="Georgia" pitchFamily="34" charset="-122"/>
                 <a:cs typeface="Georgia" pitchFamily="34" charset="-120"/>
               </a:rPr>
-              <a:t>Build the conceptual map.</a:t>
+              <a:t>Honest framing.</a:t>
             </a:r>
             <a:pPr algn="l" indent="0" marL="0">
               <a:lnSpc>
@@ -3765,10 +3857,72 @@
                 <a:ea typeface="Georgia" pitchFamily="34" charset="-122"/>
                 <a:cs typeface="Georgia" pitchFamily="34" charset="-120"/>
               </a:rPr>
-              <a:t> Connect today's idea to prior modules (especially Module 2 if applicable) and prior days.</a:t>
+              <a:t> Tirthaji's sūtras are not a universal speed-up. They are a </a:t>
+            </a:r>
+            <a:pPr algn="l" indent="0" marL="0">
+              <a:lnSpc>
+                <a:spcPts val="1620"/>
+              </a:lnSpc>
+              <a:spcAft>
+                <a:spcPts val="300"/>
+              </a:spcAft>
+              <a:buNone/>
+            </a:pPr>
+            <a:r>
+              <a:rPr lang="en-US" sz="1200" i="1" dirty="0">
+                <a:solidFill>
+                  <a:srgbClr val="1A1A1A"/>
+                </a:solidFill>
+                <a:latin typeface="Georgia" pitchFamily="34" charset="0"/>
+                <a:ea typeface="Georgia" pitchFamily="34" charset="-122"/>
+                <a:cs typeface="Georgia" pitchFamily="34" charset="-120"/>
+              </a:rPr>
+              <a:t>toolbox of mental shortcuts for specific patterns</a:t>
+            </a:r>
+            <a:pPr algn="l" indent="0" marL="0">
+              <a:lnSpc>
+                <a:spcPts val="1620"/>
+              </a:lnSpc>
+              <a:spcAft>
+                <a:spcPts val="300"/>
+              </a:spcAft>
+              <a:buNone/>
+            </a:pPr>
+            <a:r>
+              <a:rPr lang="en-US" sz="1200" dirty="0">
+                <a:solidFill>
+                  <a:srgbClr val="1A1A1A"/>
+                </a:solidFill>
+                <a:latin typeface="Georgia" pitchFamily="34" charset="0"/>
+                <a:ea typeface="Georgia" pitchFamily="34" charset="-122"/>
+                <a:cs typeface="Georgia" pitchFamily="34" charset="-120"/>
+              </a:rPr>
+              <a:t>. The skill is recognising when to use which tool.</a:t>
             </a:r>
             <a:endParaRPr lang="en-US" sz="1200" dirty="0"/>
           </a:p>
+        </p:txBody>
+      </p:sp>
+      <p:sp>
+        <p:nvSpPr>
+          <p:cNvPr id="8" name="Text 6"/>
+          <p:cNvSpPr/>
+          <p:nvPr/>
+        </p:nvSpPr>
+        <p:spPr>
+          <a:xfrm>
+            <a:off x="634901" y="2947839"/>
+            <a:ext cx="8102798" cy="693241"/>
+          </a:xfrm>
+          <a:prstGeom prst="rect">
+            <a:avLst/>
+          </a:prstGeom>
+          <a:noFill/>
+          <a:ln/>
+        </p:spPr>
+        <p:txBody>
+          <a:bodyPr wrap="square" lIns="0" tIns="0" rIns="0" bIns="0" rtlCol="0" anchor="t"/>
+          <a:lstStyle/>
           <a:p>
             <a:pPr algn="l" marL="342900" indent="-342900">
               <a:lnSpc>
@@ -3789,7 +3943,7 @@
                 <a:ea typeface="Georgia" pitchFamily="34" charset="-122"/>
                 <a:cs typeface="Georgia" pitchFamily="34" charset="-120"/>
               </a:rPr>
-              <a:t>Work an example</a:t>
+              <a:t>Reference.</a:t>
             </a:r>
             <a:pPr algn="l" indent="0" marL="0">
               <a:lnSpc>
@@ -3809,10 +3963,112 @@
                 <a:ea typeface="Georgia" pitchFamily="34" charset="-122"/>
                 <a:cs typeface="Georgia" pitchFamily="34" charset="-120"/>
               </a:rPr>
-              <a:t> with the whole class on the board.</a:t>
+              <a:t> Modern mathematicians (S.G. Dani, 1993; Kim Plofker, </a:t>
+            </a:r>
+            <a:pPr algn="l" indent="0" marL="0">
+              <a:lnSpc>
+                <a:spcPts val="1620"/>
+              </a:lnSpc>
+              <a:spcAft>
+                <a:spcPts val="300"/>
+              </a:spcAft>
+              <a:buNone/>
+            </a:pPr>
+            <a:r>
+              <a:rPr lang="en-US" sz="1200" i="1" dirty="0">
+                <a:solidFill>
+                  <a:srgbClr val="1A1A1A"/>
+                </a:solidFill>
+                <a:latin typeface="Georgia" pitchFamily="34" charset="0"/>
+                <a:ea typeface="Georgia" pitchFamily="34" charset="-122"/>
+                <a:cs typeface="Georgia" pitchFamily="34" charset="-120"/>
+              </a:rPr>
+              <a:t>Mathematics in India</a:t>
+            </a:r>
+            <a:pPr algn="l" indent="0" marL="0">
+              <a:lnSpc>
+                <a:spcPts val="1620"/>
+              </a:lnSpc>
+              <a:spcAft>
+                <a:spcPts val="300"/>
+              </a:spcAft>
+              <a:buNone/>
+            </a:pPr>
+            <a:r>
+              <a:rPr lang="en-US" sz="1200" dirty="0">
+                <a:solidFill>
+                  <a:srgbClr val="1A1A1A"/>
+                </a:solidFill>
+                <a:latin typeface="Georgia" pitchFamily="34" charset="0"/>
+                <a:ea typeface="Georgia" pitchFamily="34" charset="-122"/>
+                <a:cs typeface="Georgia" pitchFamily="34" charset="-120"/>
+              </a:rPr>
+              <a:t>, 2009) have written critically about the "Vedic" claim and pedagogically about the methods. Read Dani's </a:t>
+            </a:r>
+            <a:pPr algn="l" indent="0" marL="0">
+              <a:lnSpc>
+                <a:spcPts val="1620"/>
+              </a:lnSpc>
+              <a:spcAft>
+                <a:spcPts val="300"/>
+              </a:spcAft>
+              <a:buNone/>
+            </a:pPr>
+            <a:r>
+              <a:rPr lang="en-US" sz="1200" i="1" dirty="0">
+                <a:solidFill>
+                  <a:srgbClr val="1A1A1A"/>
+                </a:solidFill>
+                <a:latin typeface="Georgia" pitchFamily="34" charset="0"/>
+                <a:ea typeface="Georgia" pitchFamily="34" charset="-122"/>
+                <a:cs typeface="Georgia" pitchFamily="34" charset="-120"/>
+              </a:rPr>
+              <a:t>Frontline</a:t>
+            </a:r>
+            <a:pPr algn="l" indent="0" marL="0">
+              <a:lnSpc>
+                <a:spcPts val="1620"/>
+              </a:lnSpc>
+              <a:spcAft>
+                <a:spcPts val="300"/>
+              </a:spcAft>
+              <a:buNone/>
+            </a:pPr>
+            <a:r>
+              <a:rPr lang="en-US" sz="1200" dirty="0">
+                <a:solidFill>
+                  <a:srgbClr val="1A1A1A"/>
+                </a:solidFill>
+                <a:latin typeface="Georgia" pitchFamily="34" charset="0"/>
+                <a:ea typeface="Georgia" pitchFamily="34" charset="-122"/>
+                <a:cs typeface="Georgia" pitchFamily="34" charset="-120"/>
+              </a:rPr>
+              <a:t> article excerpt aloud (one paragraph).</a:t>
             </a:r>
             <a:endParaRPr lang="en-US" sz="1200" dirty="0"/>
           </a:p>
+        </p:txBody>
+      </p:sp>
+      <p:sp>
+        <p:nvSpPr>
+          <p:cNvPr id="9" name="Text 7"/>
+          <p:cNvSpPr/>
+          <p:nvPr/>
+        </p:nvSpPr>
+        <p:spPr>
+          <a:xfrm>
+            <a:off x="634901" y="3742581"/>
+            <a:ext cx="8102798" cy="487561"/>
+          </a:xfrm>
+          <a:prstGeom prst="rect">
+            <a:avLst/>
+          </a:prstGeom>
+          <a:noFill/>
+          <a:ln/>
+        </p:spPr>
+        <p:txBody>
+          <a:bodyPr wrap="square" lIns="0" tIns="0" rIns="0" bIns="0" rtlCol="0" anchor="t"/>
+          <a:lstStyle/>
           <a:p>
             <a:pPr algn="l" marL="342900" indent="-342900">
               <a:lnSpc>
@@ -3833,7 +4089,7 @@
                 <a:ea typeface="Georgia" pitchFamily="34" charset="-122"/>
                 <a:cs typeface="Georgia" pitchFamily="34" charset="-120"/>
               </a:rPr>
-              <a:t>Independent or paired practice</a:t>
+              <a:t>Reflection.</a:t>
             </a:r>
             <a:pPr algn="l" indent="0" marL="0">
               <a:lnSpc>
@@ -3853,7 +4109,7 @@
                 <a:ea typeface="Georgia" pitchFamily="34" charset="-122"/>
                 <a:cs typeface="Georgia" pitchFamily="34" charset="-120"/>
               </a:rPr>
-              <a:t> for ~5 minutes.</a:t>
+              <a:t> Each student writes 3 sentences: which method-types are useful, what limits are, and where standard arithmetic remains best.</a:t>
             </a:r>
             <a:endParaRPr lang="en-US" sz="1200" dirty="0"/>
           </a:p>
@@ -3861,7 +4117,7 @@
       </p:sp>
       <p:sp>
         <p:nvSpPr>
-          <p:cNvPr id="5" name="Text 3"/>
+          <p:cNvPr id="10" name="Text 8"/>
           <p:cNvSpPr/>
           <p:nvPr/>
         </p:nvSpPr>

--- a/exports/pptx/lessons/senior-module-07-eleven-multiplication/day-07-limits-of-the-method.pptx
+++ b/exports/pptx/lessons/senior-module-07-eleven-multiplication/day-07-limits-of-the-method.pptx
@@ -16,9 +16,13 @@
     <p:sldId id="264" r:id="rId10"/>
     <p:sldId id="265" r:id="rId11"/>
     <p:sldId id="266" r:id="rId12"/>
+    <p:sldId id="267" r:id="rId13"/>
+    <p:sldId id="268" r:id="rId14"/>
+    <p:sldId id="269" r:id="rId15"/>
+    <p:sldId id="270" r:id="rId16"/>
   </p:sldIdLst>
   <p:notesMasterIdLst>
-    <p:notesMasterId r:id="rId13"/>
+    <p:notesMasterId r:id="rId17"/>
   </p:notesMasterIdLst>
   <p:sldSz cx="9144000" cy="5143500"/>
   <p:notesSz cx="5143500" cy="9144000"/>
@@ -712,6 +716,358 @@
             <a:fld id="{F7021451-1387-4CA6-816F-3879F97B5CBC}" type="slidenum">
               <a:rPr lang="en-US"/>
               <a:t>11</a:t>
+            </a:fld>
+            <a:endParaRPr lang="en-US"/>
+          </a:p>
+        </p:txBody>
+      </p:sp>
+    </p:spTree>
+    <p:extLst>
+      <p:ext uri="{BB962C8B-B14F-4D97-AF65-F5344CB8AC3E}">
+        <p14:creationId xmlns:p14="http://schemas.microsoft.com/office/powerpoint/2010/main" val="1024086991"/>
+      </p:ext>
+    </p:extLst>
+  </p:cSld>
+  <p:clrMapOvr>
+    <a:masterClrMapping/>
+  </p:clrMapOvr>
+</p:notes>
+</file>
+
+<file path=ppt/notesSlides/notesSlide12.xml><?xml version="1.0" encoding="utf-8"?>
+<p:notes xmlns:a="http://schemas.openxmlformats.org/drawingml/2006/main" xmlns:r="http://schemas.openxmlformats.org/officeDocument/2006/relationships" xmlns:p="http://schemas.openxmlformats.org/presentationml/2006/main">
+  <p:cSld>
+    <p:spTree>
+      <p:nvGrpSpPr>
+        <p:cNvPr id="1" name=""/>
+        <p:cNvGrpSpPr/>
+        <p:nvPr/>
+      </p:nvGrpSpPr>
+      <p:grpSpPr>
+        <a:xfrm>
+          <a:off x="0" y="0"/>
+          <a:ext cx="0" cy="0"/>
+          <a:chOff x="0" y="0"/>
+          <a:chExt cx="0" cy="0"/>
+        </a:xfrm>
+      </p:grpSpPr>
+      <p:sp>
+        <p:nvSpPr>
+          <p:cNvPr id="2" name="Slide Image Placeholder 1"/>
+          <p:cNvSpPr>
+            <a:spLocks noGrp="1" noRot="1" noChangeAspect="1"/>
+          </p:cNvSpPr>
+          <p:nvPr>
+            <p:ph type="sldImg"/>
+          </p:nvPr>
+        </p:nvSpPr>
+        <p:spPr/>
+      </p:sp>
+      <p:sp>
+        <p:nvSpPr>
+          <p:cNvPr id="3" name="Notes Placeholder 2"/>
+          <p:cNvSpPr>
+            <a:spLocks noGrp="1"/>
+          </p:cNvSpPr>
+          <p:nvPr>
+            <p:ph type="body" idx="1"/>
+          </p:nvPr>
+        </p:nvSpPr>
+        <p:spPr/>
+        <p:txBody>
+          <a:bodyPr/>
+          <a:lstStyle/>
+          <a:p>
+            <a:r>
+              <a:rPr lang="en-US" dirty="0"/>
+              <a:t/>
+            </a:r>
+            <a:endParaRPr lang="en-US" dirty="0"/>
+          </a:p>
+        </p:txBody>
+      </p:sp>
+      <p:sp>
+        <p:nvSpPr>
+          <p:cNvPr id="4" name="Slide Number Placeholder 3"/>
+          <p:cNvSpPr>
+            <a:spLocks noGrp="1"/>
+          </p:cNvSpPr>
+          <p:nvPr>
+            <p:ph type="sldNum" sz="quarter" idx="10"/>
+          </p:nvPr>
+        </p:nvSpPr>
+        <p:spPr/>
+        <p:txBody>
+          <a:bodyPr/>
+          <a:lstStyle/>
+          <a:p>
+            <a:fld id="{F7021451-1387-4CA6-816F-3879F97B5CBC}" type="slidenum">
+              <a:rPr lang="en-US"/>
+              <a:t>12</a:t>
+            </a:fld>
+            <a:endParaRPr lang="en-US"/>
+          </a:p>
+        </p:txBody>
+      </p:sp>
+    </p:spTree>
+    <p:extLst>
+      <p:ext uri="{BB962C8B-B14F-4D97-AF65-F5344CB8AC3E}">
+        <p14:creationId xmlns:p14="http://schemas.microsoft.com/office/powerpoint/2010/main" val="1024086991"/>
+      </p:ext>
+    </p:extLst>
+  </p:cSld>
+  <p:clrMapOvr>
+    <a:masterClrMapping/>
+  </p:clrMapOvr>
+</p:notes>
+</file>
+
+<file path=ppt/notesSlides/notesSlide13.xml><?xml version="1.0" encoding="utf-8"?>
+<p:notes xmlns:a="http://schemas.openxmlformats.org/drawingml/2006/main" xmlns:r="http://schemas.openxmlformats.org/officeDocument/2006/relationships" xmlns:p="http://schemas.openxmlformats.org/presentationml/2006/main">
+  <p:cSld>
+    <p:spTree>
+      <p:nvGrpSpPr>
+        <p:cNvPr id="1" name=""/>
+        <p:cNvGrpSpPr/>
+        <p:nvPr/>
+      </p:nvGrpSpPr>
+      <p:grpSpPr>
+        <a:xfrm>
+          <a:off x="0" y="0"/>
+          <a:ext cx="0" cy="0"/>
+          <a:chOff x="0" y="0"/>
+          <a:chExt cx="0" cy="0"/>
+        </a:xfrm>
+      </p:grpSpPr>
+      <p:sp>
+        <p:nvSpPr>
+          <p:cNvPr id="2" name="Slide Image Placeholder 1"/>
+          <p:cNvSpPr>
+            <a:spLocks noGrp="1" noRot="1" noChangeAspect="1"/>
+          </p:cNvSpPr>
+          <p:nvPr>
+            <p:ph type="sldImg"/>
+          </p:nvPr>
+        </p:nvSpPr>
+        <p:spPr/>
+      </p:sp>
+      <p:sp>
+        <p:nvSpPr>
+          <p:cNvPr id="3" name="Notes Placeholder 2"/>
+          <p:cNvSpPr>
+            <a:spLocks noGrp="1"/>
+          </p:cNvSpPr>
+          <p:nvPr>
+            <p:ph type="body" idx="1"/>
+          </p:nvPr>
+        </p:nvSpPr>
+        <p:spPr/>
+        <p:txBody>
+          <a:bodyPr/>
+          <a:lstStyle/>
+          <a:p>
+            <a:r>
+              <a:rPr lang="en-US" dirty="0"/>
+              <a:t/>
+            </a:r>
+            <a:endParaRPr lang="en-US" dirty="0"/>
+          </a:p>
+        </p:txBody>
+      </p:sp>
+      <p:sp>
+        <p:nvSpPr>
+          <p:cNvPr id="4" name="Slide Number Placeholder 3"/>
+          <p:cNvSpPr>
+            <a:spLocks noGrp="1"/>
+          </p:cNvSpPr>
+          <p:nvPr>
+            <p:ph type="sldNum" sz="quarter" idx="10"/>
+          </p:nvPr>
+        </p:nvSpPr>
+        <p:spPr/>
+        <p:txBody>
+          <a:bodyPr/>
+          <a:lstStyle/>
+          <a:p>
+            <a:fld id="{F7021451-1387-4CA6-816F-3879F97B5CBC}" type="slidenum">
+              <a:rPr lang="en-US"/>
+              <a:t>13</a:t>
+            </a:fld>
+            <a:endParaRPr lang="en-US"/>
+          </a:p>
+        </p:txBody>
+      </p:sp>
+    </p:spTree>
+    <p:extLst>
+      <p:ext uri="{BB962C8B-B14F-4D97-AF65-F5344CB8AC3E}">
+        <p14:creationId xmlns:p14="http://schemas.microsoft.com/office/powerpoint/2010/main" val="1024086991"/>
+      </p:ext>
+    </p:extLst>
+  </p:cSld>
+  <p:clrMapOvr>
+    <a:masterClrMapping/>
+  </p:clrMapOvr>
+</p:notes>
+</file>
+
+<file path=ppt/notesSlides/notesSlide14.xml><?xml version="1.0" encoding="utf-8"?>
+<p:notes xmlns:a="http://schemas.openxmlformats.org/drawingml/2006/main" xmlns:r="http://schemas.openxmlformats.org/officeDocument/2006/relationships" xmlns:p="http://schemas.openxmlformats.org/presentationml/2006/main">
+  <p:cSld>
+    <p:spTree>
+      <p:nvGrpSpPr>
+        <p:cNvPr id="1" name=""/>
+        <p:cNvGrpSpPr/>
+        <p:nvPr/>
+      </p:nvGrpSpPr>
+      <p:grpSpPr>
+        <a:xfrm>
+          <a:off x="0" y="0"/>
+          <a:ext cx="0" cy="0"/>
+          <a:chOff x="0" y="0"/>
+          <a:chExt cx="0" cy="0"/>
+        </a:xfrm>
+      </p:grpSpPr>
+      <p:sp>
+        <p:nvSpPr>
+          <p:cNvPr id="2" name="Slide Image Placeholder 1"/>
+          <p:cNvSpPr>
+            <a:spLocks noGrp="1" noRot="1" noChangeAspect="1"/>
+          </p:cNvSpPr>
+          <p:nvPr>
+            <p:ph type="sldImg"/>
+          </p:nvPr>
+        </p:nvSpPr>
+        <p:spPr/>
+      </p:sp>
+      <p:sp>
+        <p:nvSpPr>
+          <p:cNvPr id="3" name="Notes Placeholder 2"/>
+          <p:cNvSpPr>
+            <a:spLocks noGrp="1"/>
+          </p:cNvSpPr>
+          <p:nvPr>
+            <p:ph type="body" idx="1"/>
+          </p:nvPr>
+        </p:nvSpPr>
+        <p:spPr/>
+        <p:txBody>
+          <a:bodyPr/>
+          <a:lstStyle/>
+          <a:p>
+            <a:r>
+              <a:rPr lang="en-US" dirty="0"/>
+              <a:t/>
+            </a:r>
+            <a:endParaRPr lang="en-US" dirty="0"/>
+          </a:p>
+        </p:txBody>
+      </p:sp>
+      <p:sp>
+        <p:nvSpPr>
+          <p:cNvPr id="4" name="Slide Number Placeholder 3"/>
+          <p:cNvSpPr>
+            <a:spLocks noGrp="1"/>
+          </p:cNvSpPr>
+          <p:nvPr>
+            <p:ph type="sldNum" sz="quarter" idx="10"/>
+          </p:nvPr>
+        </p:nvSpPr>
+        <p:spPr/>
+        <p:txBody>
+          <a:bodyPr/>
+          <a:lstStyle/>
+          <a:p>
+            <a:fld id="{F7021451-1387-4CA6-816F-3879F97B5CBC}" type="slidenum">
+              <a:rPr lang="en-US"/>
+              <a:t>14</a:t>
+            </a:fld>
+            <a:endParaRPr lang="en-US"/>
+          </a:p>
+        </p:txBody>
+      </p:sp>
+    </p:spTree>
+    <p:extLst>
+      <p:ext uri="{BB962C8B-B14F-4D97-AF65-F5344CB8AC3E}">
+        <p14:creationId xmlns:p14="http://schemas.microsoft.com/office/powerpoint/2010/main" val="1024086991"/>
+      </p:ext>
+    </p:extLst>
+  </p:cSld>
+  <p:clrMapOvr>
+    <a:masterClrMapping/>
+  </p:clrMapOvr>
+</p:notes>
+</file>
+
+<file path=ppt/notesSlides/notesSlide15.xml><?xml version="1.0" encoding="utf-8"?>
+<p:notes xmlns:a="http://schemas.openxmlformats.org/drawingml/2006/main" xmlns:r="http://schemas.openxmlformats.org/officeDocument/2006/relationships" xmlns:p="http://schemas.openxmlformats.org/presentationml/2006/main">
+  <p:cSld>
+    <p:spTree>
+      <p:nvGrpSpPr>
+        <p:cNvPr id="1" name=""/>
+        <p:cNvGrpSpPr/>
+        <p:nvPr/>
+      </p:nvGrpSpPr>
+      <p:grpSpPr>
+        <a:xfrm>
+          <a:off x="0" y="0"/>
+          <a:ext cx="0" cy="0"/>
+          <a:chOff x="0" y="0"/>
+          <a:chExt cx="0" cy="0"/>
+        </a:xfrm>
+      </p:grpSpPr>
+      <p:sp>
+        <p:nvSpPr>
+          <p:cNvPr id="2" name="Slide Image Placeholder 1"/>
+          <p:cNvSpPr>
+            <a:spLocks noGrp="1" noRot="1" noChangeAspect="1"/>
+          </p:cNvSpPr>
+          <p:nvPr>
+            <p:ph type="sldImg"/>
+          </p:nvPr>
+        </p:nvSpPr>
+        <p:spPr/>
+      </p:sp>
+      <p:sp>
+        <p:nvSpPr>
+          <p:cNvPr id="3" name="Notes Placeholder 2"/>
+          <p:cNvSpPr>
+            <a:spLocks noGrp="1"/>
+          </p:cNvSpPr>
+          <p:nvPr>
+            <p:ph type="body" idx="1"/>
+          </p:nvPr>
+        </p:nvSpPr>
+        <p:spPr/>
+        <p:txBody>
+          <a:bodyPr/>
+          <a:lstStyle/>
+          <a:p>
+            <a:r>
+              <a:rPr lang="en-US" dirty="0"/>
+              <a:t/>
+            </a:r>
+            <a:endParaRPr lang="en-US" dirty="0"/>
+          </a:p>
+        </p:txBody>
+      </p:sp>
+      <p:sp>
+        <p:nvSpPr>
+          <p:cNvPr id="4" name="Slide Number Placeholder 3"/>
+          <p:cNvSpPr>
+            <a:spLocks noGrp="1"/>
+          </p:cNvSpPr>
+          <p:nvPr>
+            <p:ph type="sldNum" sz="quarter" idx="10"/>
+          </p:nvPr>
+        </p:nvSpPr>
+        <p:spPr/>
+        <p:txBody>
+          <a:bodyPr/>
+          <a:lstStyle/>
+          <a:p>
+            <a:fld id="{F7021451-1387-4CA6-816F-3879F97B5CBC}" type="slidenum">
+              <a:rPr lang="en-US"/>
+              <a:t>15</a:t>
             </a:fld>
             <a:endParaRPr lang="en-US"/>
           </a:p>
@@ -2011,102 +2367,6 @@
         </p:nvSpPr>
         <p:spPr>
           <a:xfrm>
-            <a:off x="406301" y="1223963"/>
-            <a:ext cx="8498026" cy="274290"/>
-          </a:xfrm>
-          <a:prstGeom prst="rect">
-            <a:avLst/>
-          </a:prstGeom>
-          <a:noFill/>
-          <a:ln/>
-        </p:spPr>
-        <p:txBody>
-          <a:bodyPr wrap="square" lIns="0" tIns="0" rIns="0" bIns="0" rtlCol="0" anchor="t"/>
-          <a:lstStyle/>
-          <a:p>
-            <a:pPr algn="l" indent="0" marL="0">
-              <a:lnSpc>
-                <a:spcPts val="2160"/>
-              </a:lnSpc>
-              <a:spcBef>
-                <a:spcPts val="600"/>
-              </a:spcBef>
-              <a:spcAft>
-                <a:spcPts val="800"/>
-              </a:spcAft>
-              <a:buNone/>
-            </a:pPr>
-            <a:r>
-              <a:rPr lang="en-US" sz="1800" b="1" dirty="0">
-                <a:solidFill>
-                  <a:srgbClr val="997929"/>
-                </a:solidFill>
-                <a:latin typeface="Times New Roman" pitchFamily="34" charset="0"/>
-                <a:ea typeface="Times New Roman" pitchFamily="34" charset="-122"/>
-                <a:cs typeface="Times New Roman" pitchFamily="34" charset="-120"/>
-              </a:rPr>
-              <a:t>Learning objective</a:t>
-            </a:r>
-            <a:endParaRPr lang="en-US" sz="1800" dirty="0"/>
-          </a:p>
-        </p:txBody>
-      </p:sp>
-      <p:sp>
-        <p:nvSpPr>
-          <p:cNvPr id="6" name="Text 4"/>
-          <p:cNvSpPr/>
-          <p:nvPr/>
-        </p:nvSpPr>
-        <p:spPr>
-          <a:xfrm>
-            <a:off x="406301" y="1637854"/>
-            <a:ext cx="8498026" cy="213271"/>
-          </a:xfrm>
-          <a:prstGeom prst="rect">
-            <a:avLst/>
-          </a:prstGeom>
-          <a:noFill/>
-          <a:ln/>
-        </p:spPr>
-        <p:txBody>
-          <a:bodyPr wrap="square" lIns="0" tIns="0" rIns="0" bIns="0" rtlCol="0" anchor="t"/>
-          <a:lstStyle/>
-          <a:p>
-            <a:pPr algn="l" indent="0" marL="0">
-              <a:lnSpc>
-                <a:spcPts val="1680"/>
-              </a:lnSpc>
-              <a:spcBef>
-                <a:spcPts val="300"/>
-              </a:spcBef>
-              <a:spcAft>
-                <a:spcPts val="300"/>
-              </a:spcAft>
-              <a:buNone/>
-            </a:pPr>
-            <a:r>
-              <a:rPr lang="en-US" sz="1200" dirty="0">
-                <a:solidFill>
-                  <a:srgbClr val="1A1A1A"/>
-                </a:solidFill>
-                <a:latin typeface="Georgia" pitchFamily="34" charset="0"/>
-                <a:ea typeface="Georgia" pitchFamily="34" charset="-122"/>
-                <a:cs typeface="Georgia" pitchFamily="34" charset="-120"/>
-              </a:rPr>
-              <a:t>By the end of this lesson, students will: recognise when traditional long multiplication is faster than the sūtra method.</a:t>
-            </a:r>
-            <a:endParaRPr lang="en-US" sz="1200" dirty="0"/>
-          </a:p>
-        </p:txBody>
-      </p:sp>
-      <p:sp>
-        <p:nvSpPr>
-          <p:cNvPr id="7" name="Text 5"/>
-          <p:cNvSpPr/>
-          <p:nvPr/>
-        </p:nvSpPr>
-        <p:spPr>
-          <a:xfrm>
             <a:off x="406301" y="4434929"/>
             <a:ext cx="8498026" cy="213271"/>
           </a:xfrm>
@@ -2251,7 +2511,7 @@
                 <a:ea typeface="Times New Roman" pitchFamily="34" charset="-122"/>
                 <a:cs typeface="Times New Roman" pitchFamily="34" charset="-120"/>
               </a:rPr>
-              <a:t>Differentiation</a:t>
+              <a:t>Core (20 min) (cont.)</a:t>
             </a:r>
             <a:endParaRPr lang="en-US" sz="1800" dirty="0"/>
           </a:p>
@@ -2266,7 +2526,7 @@
         <p:spPr>
           <a:xfrm>
             <a:off x="634901" y="883593"/>
-            <a:ext cx="8102798" cy="525661"/>
+            <a:ext cx="8102798" cy="487561"/>
           </a:xfrm>
           <a:prstGeom prst="rect">
             <a:avLst/>
@@ -2297,7 +2557,7 @@
                 <a:ea typeface="Georgia" pitchFamily="34" charset="-122"/>
                 <a:cs typeface="Georgia" pitchFamily="34" charset="-120"/>
               </a:rPr>
-              <a:t>Extension:</a:t>
+              <a:t>Reflection.</a:t>
             </a:r>
             <a:pPr algn="l" indent="0" marL="0">
               <a:lnSpc>
@@ -2317,51 +2577,7 @@
                 <a:ea typeface="Georgia" pitchFamily="34" charset="-122"/>
                 <a:cs typeface="Georgia" pitchFamily="34" charset="-120"/>
               </a:rPr>
-              <a:t> offer one open question or extra problem for fast finishers.</a:t>
-            </a:r>
-            <a:endParaRPr lang="en-US" sz="1200" dirty="0"/>
-          </a:p>
-          <a:p>
-            <a:pPr algn="l" marL="342900" indent="-342900">
-              <a:lnSpc>
-                <a:spcPts val="1620"/>
-              </a:lnSpc>
-              <a:spcAft>
-                <a:spcPts val="300"/>
-              </a:spcAft>
-              <a:buSzPct val="100000"/>
-              <a:buChar char="•"/>
-            </a:pPr>
-            <a:r>
-              <a:rPr lang="en-US" sz="1200" b="1" dirty="0">
-                <a:solidFill>
-                  <a:srgbClr val="1A1A1A"/>
-                </a:solidFill>
-                <a:latin typeface="Georgia" pitchFamily="34" charset="0"/>
-                <a:ea typeface="Georgia" pitchFamily="34" charset="-122"/>
-                <a:cs typeface="Georgia" pitchFamily="34" charset="-120"/>
-              </a:rPr>
-              <a:t>Support:</a:t>
-            </a:r>
-            <a:pPr algn="l" indent="0" marL="0">
-              <a:lnSpc>
-                <a:spcPts val="1620"/>
-              </a:lnSpc>
-              <a:spcAft>
-                <a:spcPts val="300"/>
-              </a:spcAft>
-              <a:buNone/>
-            </a:pPr>
-            <a:r>
-              <a:rPr lang="en-US" sz="1200" dirty="0">
-                <a:solidFill>
-                  <a:srgbClr val="1A1A1A"/>
-                </a:solidFill>
-                <a:latin typeface="Georgia" pitchFamily="34" charset="0"/>
-                <a:ea typeface="Georgia" pitchFamily="34" charset="-122"/>
-                <a:cs typeface="Georgia" pitchFamily="34" charset="-120"/>
-              </a:rPr>
-              <a:t> pair students who need scaffolds; offer partial outlines.</a:t>
+              <a:t> Each student writes 3 sentences: which method-types are useful, what limits are, and where standard arithmetic remains best.</a:t>
             </a:r>
             <a:endParaRPr lang="en-US" sz="1200" dirty="0"/>
           </a:p>
@@ -2519,7 +2735,7 @@
                 <a:ea typeface="Times New Roman" pitchFamily="34" charset="-122"/>
                 <a:cs typeface="Times New Roman" pitchFamily="34" charset="-120"/>
               </a:rPr>
-              <a:t>Teacher notes</a:t>
+              <a:t>Activity (15 min)</a:t>
             </a:r>
             <a:endParaRPr lang="en-US" sz="1800" dirty="0"/>
           </a:p>
@@ -2534,7 +2750,7 @@
         <p:spPr>
           <a:xfrm>
             <a:off x="406301" y="870942"/>
-            <a:ext cx="8498026" cy="426541"/>
+            <a:ext cx="8498026" cy="436066"/>
           </a:xfrm>
           <a:prstGeom prst="rect">
             <a:avLst/>
@@ -2567,7 +2783,1095 @@
                 <a:ea typeface="Georgia" pitchFamily="34" charset="-122"/>
                 <a:cs typeface="Georgia" pitchFamily="34" charset="-120"/>
               </a:rPr>
-              <a:t>– Citations: at least one quoted verse with citation per module. Day 1 already includes one if applicable; you may add more. – Connect to prior modules where natural (especially Module 2 pañcabhūta).</a:t>
+              <a:t>A scaled version of </a:t>
+            </a:r>
+            <a:pPr algn="l" indent="0" marL="0">
+              <a:lnSpc>
+                <a:spcPts val="1680"/>
+              </a:lnSpc>
+              <a:spcBef>
+                <a:spcPts val="300"/>
+              </a:spcBef>
+              <a:spcAft>
+                <a:spcPts val="300"/>
+              </a:spcAft>
+              <a:buNone/>
+            </a:pPr>
+            <a:r>
+              <a:rPr lang="en-US" sz="1200" i="1" dirty="0">
+                <a:solidFill>
+                  <a:srgbClr val="1A1A1A"/>
+                </a:solidFill>
+                <a:latin typeface="Georgia" pitchFamily="34" charset="0"/>
+                <a:ea typeface="Georgia" pitchFamily="34" charset="-122"/>
+                <a:cs typeface="Georgia" pitchFamily="34" charset="-120"/>
+              </a:rPr>
+              <a:t>Mental Math Sprint Cards</a:t>
+            </a:r>
+            <a:pPr algn="l" indent="0" marL="0">
+              <a:lnSpc>
+                <a:spcPts val="1680"/>
+              </a:lnSpc>
+              <a:spcBef>
+                <a:spcPts val="300"/>
+              </a:spcBef>
+              <a:spcAft>
+                <a:spcPts val="300"/>
+              </a:spcAft>
+              <a:buNone/>
+            </a:pPr>
+            <a:r>
+              <a:rPr lang="en-US" sz="1200" dirty="0">
+                <a:solidFill>
+                  <a:srgbClr val="1A1A1A"/>
+                </a:solidFill>
+                <a:latin typeface="Georgia" pitchFamily="34" charset="0"/>
+                <a:ea typeface="Georgia" pitchFamily="34" charset="-122"/>
+                <a:cs typeface="Georgia" pitchFamily="34" charset="-120"/>
+              </a:rPr>
+              <a:t> (see </a:t>
+            </a:r>
+            <a:pPr algn="l" indent="0" marL="0">
+              <a:lnSpc>
+                <a:spcPts val="1680"/>
+              </a:lnSpc>
+              <a:spcBef>
+                <a:spcPts val="300"/>
+              </a:spcBef>
+              <a:spcAft>
+                <a:spcPts val="300"/>
+              </a:spcAft>
+              <a:buNone/>
+            </a:pPr>
+            <a:r>
+              <a:rPr lang="en-US" sz="1200" dirty="0">
+                <a:solidFill>
+                  <a:srgbClr val="1A1A1A"/>
+                </a:solidFill>
+                <a:latin typeface="Georgia" pitchFamily="34" charset="0"/>
+                <a:ea typeface="Georgia" pitchFamily="34" charset="-122"/>
+                <a:cs typeface="Georgia" pitchFamily="34" charset="-120"/>
+              </a:rPr>
+              <a:t>activities/</a:t>
+            </a:r>
+            <a:pPr algn="l" indent="0" marL="0">
+              <a:lnSpc>
+                <a:spcPts val="1680"/>
+              </a:lnSpc>
+              <a:spcBef>
+                <a:spcPts val="300"/>
+              </a:spcBef>
+              <a:spcAft>
+                <a:spcPts val="300"/>
+              </a:spcAft>
+              <a:buNone/>
+            </a:pPr>
+            <a:r>
+              <a:rPr lang="en-US" sz="1200" dirty="0">
+                <a:solidFill>
+                  <a:srgbClr val="1A1A1A"/>
+                </a:solidFill>
+                <a:latin typeface="Georgia" pitchFamily="34" charset="0"/>
+                <a:ea typeface="Georgia" pitchFamily="34" charset="-122"/>
+                <a:cs typeface="Georgia" pitchFamily="34" charset="-120"/>
+              </a:rPr>
+              <a:t>). Today's slice: focus on the part of the activity that reinforces Limits of the Method.</a:t>
+            </a:r>
+            <a:endParaRPr lang="en-US" sz="1200" dirty="0"/>
+          </a:p>
+        </p:txBody>
+      </p:sp>
+      <p:sp>
+        <p:nvSpPr>
+          <p:cNvPr id="5" name="Text 3"/>
+          <p:cNvSpPr/>
+          <p:nvPr/>
+        </p:nvSpPr>
+        <p:spPr>
+          <a:xfrm>
+            <a:off x="406301" y="4434929"/>
+            <a:ext cx="8498026" cy="213271"/>
+          </a:xfrm>
+          <a:prstGeom prst="rect">
+            <a:avLst/>
+          </a:prstGeom>
+          <a:noFill/>
+          <a:ln/>
+        </p:spPr>
+        <p:txBody>
+          <a:bodyPr wrap="square" lIns="0" tIns="0" rIns="0" bIns="0" rtlCol="0" anchor="t"/>
+          <a:lstStyle/>
+          <a:p>
+            <a:pPr algn="l" indent="0" marL="0">
+              <a:lnSpc>
+                <a:spcPts val="1680"/>
+              </a:lnSpc>
+              <a:spcBef>
+                <a:spcPts val="300"/>
+              </a:spcBef>
+              <a:spcAft>
+                <a:spcPts val="300"/>
+              </a:spcAft>
+              <a:buNone/>
+            </a:pPr>
+            <a:r>
+              <a:rPr lang="en-US" sz="1200" dirty="0">
+                <a:solidFill>
+                  <a:srgbClr val="1A1A1A"/>
+                </a:solidFill>
+                <a:latin typeface="Georgia" pitchFamily="34" charset="0"/>
+                <a:ea typeface="Georgia" pitchFamily="34" charset="-122"/>
+                <a:cs typeface="Georgia" pitchFamily="34" charset="-120"/>
+              </a:rPr>
+              <a:t>Senior ·  · IKS Curriculum</a:t>
+            </a:r>
+            <a:endParaRPr lang="en-US" sz="1200" dirty="0"/>
+          </a:p>
+        </p:txBody>
+      </p:sp>
+    </p:spTree>
+  </p:cSld>
+  <p:clrMapOvr>
+    <a:masterClrMapping/>
+  </p:clrMapOvr>
+</p:sld>
+</file>
+
+<file path=ppt/slides/slide12.xml><?xml version="1.0" encoding="utf-8"?>
+<p:sld xmlns:a="http://schemas.openxmlformats.org/drawingml/2006/main" xmlns:r="http://schemas.openxmlformats.org/officeDocument/2006/relationships" xmlns:p="http://schemas.openxmlformats.org/presentationml/2006/main">
+  <p:cSld name="Slide 12">
+    <p:bg>
+      <p:bgPr>
+        <a:solidFill>
+          <a:srgbClr val="FAF7F2"/>
+        </a:solidFill>
+      </p:bgPr>
+    </p:bg>
+    <p:spTree>
+      <p:nvGrpSpPr>
+        <p:cNvPr id="1" name=""/>
+        <p:cNvGrpSpPr/>
+        <p:nvPr/>
+      </p:nvGrpSpPr>
+      <p:grpSpPr>
+        <a:xfrm>
+          <a:off x="0" y="0"/>
+          <a:ext cx="0" cy="0"/>
+          <a:chOff x="0" y="0"/>
+          <a:chExt cx="0" cy="0"/>
+        </a:xfrm>
+      </p:grpSpPr>
+      <p:sp>
+        <p:nvSpPr>
+          <p:cNvPr id="2" name="Text 0"/>
+          <p:cNvSpPr/>
+          <p:nvPr/>
+        </p:nvSpPr>
+        <p:spPr>
+          <a:xfrm>
+            <a:off x="0" y="0"/>
+            <a:ext cx="9144000" cy="101501"/>
+          </a:xfrm>
+          <a:prstGeom prst="rect">
+            <a:avLst/>
+          </a:prstGeom>
+          <a:solidFill>
+            <a:srgbClr val="5D1D2E"/>
+          </a:solidFill>
+          <a:ln/>
+        </p:spPr>
+        <p:txBody>
+          <a:bodyPr wrap="square" rtlCol="0" anchor="ctr"/>
+          <a:lstStyle/>
+          <a:p>
+            <a:pPr indent="0" marL="0">
+              <a:buNone/>
+            </a:pPr>
+            <a:endParaRPr lang="en-US" dirty="0"/>
+          </a:p>
+        </p:txBody>
+      </p:sp>
+      <p:sp>
+        <p:nvSpPr>
+          <p:cNvPr id="3" name="Text 1"/>
+          <p:cNvSpPr/>
+          <p:nvPr/>
+        </p:nvSpPr>
+        <p:spPr>
+          <a:xfrm>
+            <a:off x="406301" y="457051"/>
+            <a:ext cx="8498026" cy="274290"/>
+          </a:xfrm>
+          <a:prstGeom prst="rect">
+            <a:avLst/>
+          </a:prstGeom>
+          <a:noFill/>
+          <a:ln/>
+        </p:spPr>
+        <p:txBody>
+          <a:bodyPr wrap="square" lIns="0" tIns="0" rIns="0" bIns="0" rtlCol="0" anchor="t"/>
+          <a:lstStyle/>
+          <a:p>
+            <a:pPr algn="l" indent="0" marL="0">
+              <a:lnSpc>
+                <a:spcPts val="2160"/>
+              </a:lnSpc>
+              <a:spcBef>
+                <a:spcPts val="600"/>
+              </a:spcBef>
+              <a:spcAft>
+                <a:spcPts val="800"/>
+              </a:spcAft>
+              <a:buNone/>
+            </a:pPr>
+            <a:r>
+              <a:rPr lang="en-US" sz="1800" b="1" dirty="0">
+                <a:solidFill>
+                  <a:srgbClr val="997929"/>
+                </a:solidFill>
+                <a:latin typeface="Times New Roman" pitchFamily="34" charset="0"/>
+                <a:ea typeface="Times New Roman" pitchFamily="34" charset="-122"/>
+                <a:cs typeface="Times New Roman" pitchFamily="34" charset="-120"/>
+              </a:rPr>
+              <a:t>Wrap-up (5 min)</a:t>
+            </a:r>
+            <a:endParaRPr lang="en-US" sz="1800" dirty="0"/>
+          </a:p>
+        </p:txBody>
+      </p:sp>
+      <p:sp>
+        <p:nvSpPr>
+          <p:cNvPr id="4" name="Text 2"/>
+          <p:cNvSpPr/>
+          <p:nvPr/>
+        </p:nvSpPr>
+        <p:spPr>
+          <a:xfrm>
+            <a:off x="634901" y="883593"/>
+            <a:ext cx="8102798" cy="525661"/>
+          </a:xfrm>
+          <a:prstGeom prst="rect">
+            <a:avLst/>
+          </a:prstGeom>
+          <a:noFill/>
+          <a:ln/>
+        </p:spPr>
+        <p:txBody>
+          <a:bodyPr wrap="square" lIns="0" tIns="0" rIns="0" bIns="0" rtlCol="0" anchor="t"/>
+          <a:lstStyle/>
+          <a:p>
+            <a:pPr algn="l" marL="342900" indent="-342900">
+              <a:lnSpc>
+                <a:spcPts val="1620"/>
+              </a:lnSpc>
+              <a:spcAft>
+                <a:spcPts val="300"/>
+              </a:spcAft>
+              <a:buSzPct val="100000"/>
+              <a:buChar char="•"/>
+            </a:pPr>
+            <a:r>
+              <a:rPr lang="en-US" sz="1200" dirty="0">
+                <a:solidFill>
+                  <a:srgbClr val="1A1A1A"/>
+                </a:solidFill>
+                <a:latin typeface="Georgia" pitchFamily="34" charset="0"/>
+                <a:ea typeface="Georgia" pitchFamily="34" charset="-122"/>
+                <a:cs typeface="Georgia" pitchFamily="34" charset="-120"/>
+              </a:rPr>
+              <a:t>One-sentence exit ticket: </a:t>
+            </a:r>
+            <a:pPr algn="l" indent="0" marL="0">
+              <a:lnSpc>
+                <a:spcPts val="1620"/>
+              </a:lnSpc>
+              <a:spcAft>
+                <a:spcPts val="300"/>
+              </a:spcAft>
+              <a:buNone/>
+            </a:pPr>
+            <a:r>
+              <a:rPr lang="en-US" sz="1200" i="1" dirty="0">
+                <a:solidFill>
+                  <a:srgbClr val="1A1A1A"/>
+                </a:solidFill>
+                <a:latin typeface="Georgia" pitchFamily="34" charset="0"/>
+                <a:ea typeface="Georgia" pitchFamily="34" charset="-122"/>
+                <a:cs typeface="Georgia" pitchFamily="34" charset="-120"/>
+              </a:rPr>
+              <a:t>"What's one thing you learned today?"</a:t>
+            </a:r>
+            <a:endParaRPr lang="en-US" sz="1200" dirty="0"/>
+          </a:p>
+          <a:p>
+            <a:pPr algn="l" marL="342900" indent="-342900">
+              <a:lnSpc>
+                <a:spcPts val="1620"/>
+              </a:lnSpc>
+              <a:spcAft>
+                <a:spcPts val="300"/>
+              </a:spcAft>
+              <a:buSzPct val="100000"/>
+              <a:buChar char="•"/>
+            </a:pPr>
+            <a:r>
+              <a:rPr lang="en-US" sz="1200" dirty="0">
+                <a:solidFill>
+                  <a:srgbClr val="1A1A1A"/>
+                </a:solidFill>
+                <a:latin typeface="Georgia" pitchFamily="34" charset="0"/>
+                <a:ea typeface="Georgia" pitchFamily="34" charset="-122"/>
+                <a:cs typeface="Georgia" pitchFamily="34" charset="-120"/>
+              </a:rPr>
+              <a:t>Preview tomorrow.</a:t>
+            </a:r>
+            <a:endParaRPr lang="en-US" sz="1200" dirty="0"/>
+          </a:p>
+        </p:txBody>
+      </p:sp>
+      <p:sp>
+        <p:nvSpPr>
+          <p:cNvPr id="5" name="Text 3"/>
+          <p:cNvSpPr/>
+          <p:nvPr/>
+        </p:nvSpPr>
+        <p:spPr>
+          <a:xfrm>
+            <a:off x="406301" y="4434929"/>
+            <a:ext cx="8498026" cy="213271"/>
+          </a:xfrm>
+          <a:prstGeom prst="rect">
+            <a:avLst/>
+          </a:prstGeom>
+          <a:noFill/>
+          <a:ln/>
+        </p:spPr>
+        <p:txBody>
+          <a:bodyPr wrap="square" lIns="0" tIns="0" rIns="0" bIns="0" rtlCol="0" anchor="t"/>
+          <a:lstStyle/>
+          <a:p>
+            <a:pPr algn="l" indent="0" marL="0">
+              <a:lnSpc>
+                <a:spcPts val="1680"/>
+              </a:lnSpc>
+              <a:spcBef>
+                <a:spcPts val="300"/>
+              </a:spcBef>
+              <a:spcAft>
+                <a:spcPts val="300"/>
+              </a:spcAft>
+              <a:buNone/>
+            </a:pPr>
+            <a:r>
+              <a:rPr lang="en-US" sz="1200" dirty="0">
+                <a:solidFill>
+                  <a:srgbClr val="1A1A1A"/>
+                </a:solidFill>
+                <a:latin typeface="Georgia" pitchFamily="34" charset="0"/>
+                <a:ea typeface="Georgia" pitchFamily="34" charset="-122"/>
+                <a:cs typeface="Georgia" pitchFamily="34" charset="-120"/>
+              </a:rPr>
+              <a:t>Senior ·  · IKS Curriculum</a:t>
+            </a:r>
+            <a:endParaRPr lang="en-US" sz="1200" dirty="0"/>
+          </a:p>
+        </p:txBody>
+      </p:sp>
+    </p:spTree>
+  </p:cSld>
+  <p:clrMapOvr>
+    <a:masterClrMapping/>
+  </p:clrMapOvr>
+</p:sld>
+</file>
+
+<file path=ppt/slides/slide13.xml><?xml version="1.0" encoding="utf-8"?>
+<p:sld xmlns:a="http://schemas.openxmlformats.org/drawingml/2006/main" xmlns:r="http://schemas.openxmlformats.org/officeDocument/2006/relationships" xmlns:p="http://schemas.openxmlformats.org/presentationml/2006/main">
+  <p:cSld name="Slide 13">
+    <p:bg>
+      <p:bgPr>
+        <a:solidFill>
+          <a:srgbClr val="FAF7F2"/>
+        </a:solidFill>
+      </p:bgPr>
+    </p:bg>
+    <p:spTree>
+      <p:nvGrpSpPr>
+        <p:cNvPr id="1" name=""/>
+        <p:cNvGrpSpPr/>
+        <p:nvPr/>
+      </p:nvGrpSpPr>
+      <p:grpSpPr>
+        <a:xfrm>
+          <a:off x="0" y="0"/>
+          <a:ext cx="0" cy="0"/>
+          <a:chOff x="0" y="0"/>
+          <a:chExt cx="0" cy="0"/>
+        </a:xfrm>
+      </p:grpSpPr>
+      <p:sp>
+        <p:nvSpPr>
+          <p:cNvPr id="2" name="Text 0"/>
+          <p:cNvSpPr/>
+          <p:nvPr/>
+        </p:nvSpPr>
+        <p:spPr>
+          <a:xfrm>
+            <a:off x="0" y="0"/>
+            <a:ext cx="9144000" cy="101501"/>
+          </a:xfrm>
+          <a:prstGeom prst="rect">
+            <a:avLst/>
+          </a:prstGeom>
+          <a:solidFill>
+            <a:srgbClr val="5D1D2E"/>
+          </a:solidFill>
+          <a:ln/>
+        </p:spPr>
+        <p:txBody>
+          <a:bodyPr wrap="square" rtlCol="0" anchor="ctr"/>
+          <a:lstStyle/>
+          <a:p>
+            <a:pPr indent="0" marL="0">
+              <a:buNone/>
+            </a:pPr>
+            <a:endParaRPr lang="en-US" dirty="0"/>
+          </a:p>
+        </p:txBody>
+      </p:sp>
+      <p:sp>
+        <p:nvSpPr>
+          <p:cNvPr id="3" name="Text 1"/>
+          <p:cNvSpPr/>
+          <p:nvPr/>
+        </p:nvSpPr>
+        <p:spPr>
+          <a:xfrm>
+            <a:off x="406301" y="457051"/>
+            <a:ext cx="8498026" cy="274290"/>
+          </a:xfrm>
+          <a:prstGeom prst="rect">
+            <a:avLst/>
+          </a:prstGeom>
+          <a:noFill/>
+          <a:ln/>
+        </p:spPr>
+        <p:txBody>
+          <a:bodyPr wrap="square" lIns="0" tIns="0" rIns="0" bIns="0" rtlCol="0" anchor="t"/>
+          <a:lstStyle/>
+          <a:p>
+            <a:pPr algn="l" indent="0" marL="0">
+              <a:lnSpc>
+                <a:spcPts val="2160"/>
+              </a:lnSpc>
+              <a:spcBef>
+                <a:spcPts val="600"/>
+              </a:spcBef>
+              <a:spcAft>
+                <a:spcPts val="800"/>
+              </a:spcAft>
+              <a:buNone/>
+            </a:pPr>
+            <a:r>
+              <a:rPr lang="en-US" sz="1800" b="1" dirty="0">
+                <a:solidFill>
+                  <a:srgbClr val="997929"/>
+                </a:solidFill>
+                <a:latin typeface="Times New Roman" pitchFamily="34" charset="0"/>
+                <a:ea typeface="Times New Roman" pitchFamily="34" charset="-122"/>
+                <a:cs typeface="Times New Roman" pitchFamily="34" charset="-120"/>
+              </a:rPr>
+              <a:t>Homework</a:t>
+            </a:r>
+            <a:endParaRPr lang="en-US" sz="1800" dirty="0"/>
+          </a:p>
+        </p:txBody>
+      </p:sp>
+      <p:sp>
+        <p:nvSpPr>
+          <p:cNvPr id="4" name="Text 2"/>
+          <p:cNvSpPr/>
+          <p:nvPr/>
+        </p:nvSpPr>
+        <p:spPr>
+          <a:xfrm>
+            <a:off x="406301" y="870942"/>
+            <a:ext cx="8498026" cy="222796"/>
+          </a:xfrm>
+          <a:prstGeom prst="rect">
+            <a:avLst/>
+          </a:prstGeom>
+          <a:noFill/>
+          <a:ln/>
+        </p:spPr>
+        <p:txBody>
+          <a:bodyPr wrap="square" lIns="0" tIns="0" rIns="0" bIns="0" rtlCol="0" anchor="t"/>
+          <a:lstStyle/>
+          <a:p>
+            <a:pPr algn="l" indent="0" marL="0">
+              <a:lnSpc>
+                <a:spcPts val="1680"/>
+              </a:lnSpc>
+              <a:spcBef>
+                <a:spcPts val="300"/>
+              </a:spcBef>
+              <a:spcAft>
+                <a:spcPts val="300"/>
+              </a:spcAft>
+              <a:buNone/>
+            </a:pPr>
+            <a:r>
+              <a:rPr lang="en-US" sz="1200" dirty="0">
+                <a:solidFill>
+                  <a:srgbClr val="1A1A1A"/>
+                </a:solidFill>
+                <a:latin typeface="Georgia" pitchFamily="34" charset="0"/>
+                <a:ea typeface="Georgia" pitchFamily="34" charset="-122"/>
+                <a:cs typeface="Georgia" pitchFamily="34" charset="-120"/>
+              </a:rPr>
+              <a:t>(See </a:t>
+            </a:r>
+            <a:pPr algn="l" indent="0" marL="0">
+              <a:lnSpc>
+                <a:spcPts val="1680"/>
+              </a:lnSpc>
+              <a:spcBef>
+                <a:spcPts val="300"/>
+              </a:spcBef>
+              <a:spcAft>
+                <a:spcPts val="300"/>
+              </a:spcAft>
+              <a:buNone/>
+            </a:pPr>
+            <a:r>
+              <a:rPr lang="en-US" sz="1200" dirty="0">
+                <a:solidFill>
+                  <a:srgbClr val="1A1A1A"/>
+                </a:solidFill>
+                <a:latin typeface="Georgia" pitchFamily="34" charset="0"/>
+                <a:ea typeface="Georgia" pitchFamily="34" charset="-122"/>
+                <a:cs typeface="Georgia" pitchFamily="34" charset="-120"/>
+              </a:rPr>
+              <a:t>homework.md</a:t>
+            </a:r>
+            <a:pPr algn="l" indent="0" marL="0">
+              <a:lnSpc>
+                <a:spcPts val="1680"/>
+              </a:lnSpc>
+              <a:spcBef>
+                <a:spcPts val="300"/>
+              </a:spcBef>
+              <a:spcAft>
+                <a:spcPts val="300"/>
+              </a:spcAft>
+              <a:buNone/>
+            </a:pPr>
+            <a:r>
+              <a:rPr lang="en-US" sz="1200" dirty="0">
+                <a:solidFill>
+                  <a:srgbClr val="1A1A1A"/>
+                </a:solidFill>
+                <a:latin typeface="Georgia" pitchFamily="34" charset="0"/>
+                <a:ea typeface="Georgia" pitchFamily="34" charset="-122"/>
+                <a:cs typeface="Georgia" pitchFamily="34" charset="-120"/>
+              </a:rPr>
+              <a:t> for today's task.)</a:t>
+            </a:r>
+            <a:endParaRPr lang="en-US" sz="1200" dirty="0"/>
+          </a:p>
+        </p:txBody>
+      </p:sp>
+      <p:sp>
+        <p:nvSpPr>
+          <p:cNvPr id="5" name="Text 3"/>
+          <p:cNvSpPr/>
+          <p:nvPr/>
+        </p:nvSpPr>
+        <p:spPr>
+          <a:xfrm>
+            <a:off x="406301" y="4434929"/>
+            <a:ext cx="8498026" cy="213271"/>
+          </a:xfrm>
+          <a:prstGeom prst="rect">
+            <a:avLst/>
+          </a:prstGeom>
+          <a:noFill/>
+          <a:ln/>
+        </p:spPr>
+        <p:txBody>
+          <a:bodyPr wrap="square" lIns="0" tIns="0" rIns="0" bIns="0" rtlCol="0" anchor="t"/>
+          <a:lstStyle/>
+          <a:p>
+            <a:pPr algn="l" indent="0" marL="0">
+              <a:lnSpc>
+                <a:spcPts val="1680"/>
+              </a:lnSpc>
+              <a:spcBef>
+                <a:spcPts val="300"/>
+              </a:spcBef>
+              <a:spcAft>
+                <a:spcPts val="300"/>
+              </a:spcAft>
+              <a:buNone/>
+            </a:pPr>
+            <a:r>
+              <a:rPr lang="en-US" sz="1200" dirty="0">
+                <a:solidFill>
+                  <a:srgbClr val="1A1A1A"/>
+                </a:solidFill>
+                <a:latin typeface="Georgia" pitchFamily="34" charset="0"/>
+                <a:ea typeface="Georgia" pitchFamily="34" charset="-122"/>
+                <a:cs typeface="Georgia" pitchFamily="34" charset="-120"/>
+              </a:rPr>
+              <a:t>Senior ·  · IKS Curriculum</a:t>
+            </a:r>
+            <a:endParaRPr lang="en-US" sz="1200" dirty="0"/>
+          </a:p>
+        </p:txBody>
+      </p:sp>
+    </p:spTree>
+  </p:cSld>
+  <p:clrMapOvr>
+    <a:masterClrMapping/>
+  </p:clrMapOvr>
+</p:sld>
+</file>
+
+<file path=ppt/slides/slide14.xml><?xml version="1.0" encoding="utf-8"?>
+<p:sld xmlns:a="http://schemas.openxmlformats.org/drawingml/2006/main" xmlns:r="http://schemas.openxmlformats.org/officeDocument/2006/relationships" xmlns:p="http://schemas.openxmlformats.org/presentationml/2006/main">
+  <p:cSld name="Slide 14">
+    <p:bg>
+      <p:bgPr>
+        <a:solidFill>
+          <a:srgbClr val="FAF7F2"/>
+        </a:solidFill>
+      </p:bgPr>
+    </p:bg>
+    <p:spTree>
+      <p:nvGrpSpPr>
+        <p:cNvPr id="1" name=""/>
+        <p:cNvGrpSpPr/>
+        <p:nvPr/>
+      </p:nvGrpSpPr>
+      <p:grpSpPr>
+        <a:xfrm>
+          <a:off x="0" y="0"/>
+          <a:ext cx="0" cy="0"/>
+          <a:chOff x="0" y="0"/>
+          <a:chExt cx="0" cy="0"/>
+        </a:xfrm>
+      </p:grpSpPr>
+      <p:sp>
+        <p:nvSpPr>
+          <p:cNvPr id="2" name="Text 0"/>
+          <p:cNvSpPr/>
+          <p:nvPr/>
+        </p:nvSpPr>
+        <p:spPr>
+          <a:xfrm>
+            <a:off x="0" y="0"/>
+            <a:ext cx="9144000" cy="101501"/>
+          </a:xfrm>
+          <a:prstGeom prst="rect">
+            <a:avLst/>
+          </a:prstGeom>
+          <a:solidFill>
+            <a:srgbClr val="5D1D2E"/>
+          </a:solidFill>
+          <a:ln/>
+        </p:spPr>
+        <p:txBody>
+          <a:bodyPr wrap="square" rtlCol="0" anchor="ctr"/>
+          <a:lstStyle/>
+          <a:p>
+            <a:pPr indent="0" marL="0">
+              <a:buNone/>
+            </a:pPr>
+            <a:endParaRPr lang="en-US" dirty="0"/>
+          </a:p>
+        </p:txBody>
+      </p:sp>
+      <p:sp>
+        <p:nvSpPr>
+          <p:cNvPr id="3" name="Text 1"/>
+          <p:cNvSpPr/>
+          <p:nvPr/>
+        </p:nvSpPr>
+        <p:spPr>
+          <a:xfrm>
+            <a:off x="406301" y="457051"/>
+            <a:ext cx="8498026" cy="274290"/>
+          </a:xfrm>
+          <a:prstGeom prst="rect">
+            <a:avLst/>
+          </a:prstGeom>
+          <a:noFill/>
+          <a:ln/>
+        </p:spPr>
+        <p:txBody>
+          <a:bodyPr wrap="square" lIns="0" tIns="0" rIns="0" bIns="0" rtlCol="0" anchor="t"/>
+          <a:lstStyle/>
+          <a:p>
+            <a:pPr algn="l" indent="0" marL="0">
+              <a:lnSpc>
+                <a:spcPts val="2160"/>
+              </a:lnSpc>
+              <a:spcBef>
+                <a:spcPts val="600"/>
+              </a:spcBef>
+              <a:spcAft>
+                <a:spcPts val="800"/>
+              </a:spcAft>
+              <a:buNone/>
+            </a:pPr>
+            <a:r>
+              <a:rPr lang="en-US" sz="1800" b="1" dirty="0">
+                <a:solidFill>
+                  <a:srgbClr val="997929"/>
+                </a:solidFill>
+                <a:latin typeface="Times New Roman" pitchFamily="34" charset="0"/>
+                <a:ea typeface="Times New Roman" pitchFamily="34" charset="-122"/>
+                <a:cs typeface="Times New Roman" pitchFamily="34" charset="-120"/>
+              </a:rPr>
+              <a:t>Differentiation</a:t>
+            </a:r>
+            <a:endParaRPr lang="en-US" sz="1800" dirty="0"/>
+          </a:p>
+        </p:txBody>
+      </p:sp>
+      <p:sp>
+        <p:nvSpPr>
+          <p:cNvPr id="4" name="Text 2"/>
+          <p:cNvSpPr/>
+          <p:nvPr/>
+        </p:nvSpPr>
+        <p:spPr>
+          <a:xfrm>
+            <a:off x="634901" y="883593"/>
+            <a:ext cx="8102798" cy="525661"/>
+          </a:xfrm>
+          <a:prstGeom prst="rect">
+            <a:avLst/>
+          </a:prstGeom>
+          <a:noFill/>
+          <a:ln/>
+        </p:spPr>
+        <p:txBody>
+          <a:bodyPr wrap="square" lIns="0" tIns="0" rIns="0" bIns="0" rtlCol="0" anchor="t"/>
+          <a:lstStyle/>
+          <a:p>
+            <a:pPr algn="l" marL="342900" indent="-342900">
+              <a:lnSpc>
+                <a:spcPts val="1620"/>
+              </a:lnSpc>
+              <a:spcAft>
+                <a:spcPts val="300"/>
+              </a:spcAft>
+              <a:buSzPct val="100000"/>
+              <a:buChar char="•"/>
+            </a:pPr>
+            <a:r>
+              <a:rPr lang="en-US" sz="1200" b="1" dirty="0">
+                <a:solidFill>
+                  <a:srgbClr val="1A1A1A"/>
+                </a:solidFill>
+                <a:latin typeface="Georgia" pitchFamily="34" charset="0"/>
+                <a:ea typeface="Georgia" pitchFamily="34" charset="-122"/>
+                <a:cs typeface="Georgia" pitchFamily="34" charset="-120"/>
+              </a:rPr>
+              <a:t>Extension:</a:t>
+            </a:r>
+            <a:pPr algn="l" indent="0" marL="0">
+              <a:lnSpc>
+                <a:spcPts val="1620"/>
+              </a:lnSpc>
+              <a:spcAft>
+                <a:spcPts val="300"/>
+              </a:spcAft>
+              <a:buNone/>
+            </a:pPr>
+            <a:r>
+              <a:rPr lang="en-US" sz="1200" dirty="0">
+                <a:solidFill>
+                  <a:srgbClr val="1A1A1A"/>
+                </a:solidFill>
+                <a:latin typeface="Georgia" pitchFamily="34" charset="0"/>
+                <a:ea typeface="Georgia" pitchFamily="34" charset="-122"/>
+                <a:cs typeface="Georgia" pitchFamily="34" charset="-120"/>
+              </a:rPr>
+              <a:t> offer one open question or extra problem for fast finishers.</a:t>
+            </a:r>
+            <a:endParaRPr lang="en-US" sz="1200" dirty="0"/>
+          </a:p>
+          <a:p>
+            <a:pPr algn="l" marL="342900" indent="-342900">
+              <a:lnSpc>
+                <a:spcPts val="1620"/>
+              </a:lnSpc>
+              <a:spcAft>
+                <a:spcPts val="300"/>
+              </a:spcAft>
+              <a:buSzPct val="100000"/>
+              <a:buChar char="•"/>
+            </a:pPr>
+            <a:r>
+              <a:rPr lang="en-US" sz="1200" b="1" dirty="0">
+                <a:solidFill>
+                  <a:srgbClr val="1A1A1A"/>
+                </a:solidFill>
+                <a:latin typeface="Georgia" pitchFamily="34" charset="0"/>
+                <a:ea typeface="Georgia" pitchFamily="34" charset="-122"/>
+                <a:cs typeface="Georgia" pitchFamily="34" charset="-120"/>
+              </a:rPr>
+              <a:t>Support:</a:t>
+            </a:r>
+            <a:pPr algn="l" indent="0" marL="0">
+              <a:lnSpc>
+                <a:spcPts val="1620"/>
+              </a:lnSpc>
+              <a:spcAft>
+                <a:spcPts val="300"/>
+              </a:spcAft>
+              <a:buNone/>
+            </a:pPr>
+            <a:r>
+              <a:rPr lang="en-US" sz="1200" dirty="0">
+                <a:solidFill>
+                  <a:srgbClr val="1A1A1A"/>
+                </a:solidFill>
+                <a:latin typeface="Georgia" pitchFamily="34" charset="0"/>
+                <a:ea typeface="Georgia" pitchFamily="34" charset="-122"/>
+                <a:cs typeface="Georgia" pitchFamily="34" charset="-120"/>
+              </a:rPr>
+              <a:t> pair students who need scaffolds; offer partial outlines.</a:t>
+            </a:r>
+            <a:endParaRPr lang="en-US" sz="1200" dirty="0"/>
+          </a:p>
+        </p:txBody>
+      </p:sp>
+      <p:sp>
+        <p:nvSpPr>
+          <p:cNvPr id="5" name="Text 3"/>
+          <p:cNvSpPr/>
+          <p:nvPr/>
+        </p:nvSpPr>
+        <p:spPr>
+          <a:xfrm>
+            <a:off x="406301" y="4434929"/>
+            <a:ext cx="8498026" cy="213271"/>
+          </a:xfrm>
+          <a:prstGeom prst="rect">
+            <a:avLst/>
+          </a:prstGeom>
+          <a:noFill/>
+          <a:ln/>
+        </p:spPr>
+        <p:txBody>
+          <a:bodyPr wrap="square" lIns="0" tIns="0" rIns="0" bIns="0" rtlCol="0" anchor="t"/>
+          <a:lstStyle/>
+          <a:p>
+            <a:pPr algn="l" indent="0" marL="0">
+              <a:lnSpc>
+                <a:spcPts val="1680"/>
+              </a:lnSpc>
+              <a:spcBef>
+                <a:spcPts val="300"/>
+              </a:spcBef>
+              <a:spcAft>
+                <a:spcPts val="300"/>
+              </a:spcAft>
+              <a:buNone/>
+            </a:pPr>
+            <a:r>
+              <a:rPr lang="en-US" sz="1200" dirty="0">
+                <a:solidFill>
+                  <a:srgbClr val="1A1A1A"/>
+                </a:solidFill>
+                <a:latin typeface="Georgia" pitchFamily="34" charset="0"/>
+                <a:ea typeface="Georgia" pitchFamily="34" charset="-122"/>
+                <a:cs typeface="Georgia" pitchFamily="34" charset="-120"/>
+              </a:rPr>
+              <a:t>Senior ·  · IKS Curriculum</a:t>
+            </a:r>
+            <a:endParaRPr lang="en-US" sz="1200" dirty="0"/>
+          </a:p>
+        </p:txBody>
+      </p:sp>
+    </p:spTree>
+  </p:cSld>
+  <p:clrMapOvr>
+    <a:masterClrMapping/>
+  </p:clrMapOvr>
+</p:sld>
+</file>
+
+<file path=ppt/slides/slide15.xml><?xml version="1.0" encoding="utf-8"?>
+<p:sld xmlns:a="http://schemas.openxmlformats.org/drawingml/2006/main" xmlns:r="http://schemas.openxmlformats.org/officeDocument/2006/relationships" xmlns:p="http://schemas.openxmlformats.org/presentationml/2006/main">
+  <p:cSld name="Slide 15">
+    <p:bg>
+      <p:bgPr>
+        <a:solidFill>
+          <a:srgbClr val="FAF7F2"/>
+        </a:solidFill>
+      </p:bgPr>
+    </p:bg>
+    <p:spTree>
+      <p:nvGrpSpPr>
+        <p:cNvPr id="1" name=""/>
+        <p:cNvGrpSpPr/>
+        <p:nvPr/>
+      </p:nvGrpSpPr>
+      <p:grpSpPr>
+        <a:xfrm>
+          <a:off x="0" y="0"/>
+          <a:ext cx="0" cy="0"/>
+          <a:chOff x="0" y="0"/>
+          <a:chExt cx="0" cy="0"/>
+        </a:xfrm>
+      </p:grpSpPr>
+      <p:sp>
+        <p:nvSpPr>
+          <p:cNvPr id="2" name="Text 0"/>
+          <p:cNvSpPr/>
+          <p:nvPr/>
+        </p:nvSpPr>
+        <p:spPr>
+          <a:xfrm>
+            <a:off x="0" y="0"/>
+            <a:ext cx="9144000" cy="101501"/>
+          </a:xfrm>
+          <a:prstGeom prst="rect">
+            <a:avLst/>
+          </a:prstGeom>
+          <a:solidFill>
+            <a:srgbClr val="5D1D2E"/>
+          </a:solidFill>
+          <a:ln/>
+        </p:spPr>
+        <p:txBody>
+          <a:bodyPr wrap="square" rtlCol="0" anchor="ctr"/>
+          <a:lstStyle/>
+          <a:p>
+            <a:pPr indent="0" marL="0">
+              <a:buNone/>
+            </a:pPr>
+            <a:endParaRPr lang="en-US" dirty="0"/>
+          </a:p>
+        </p:txBody>
+      </p:sp>
+      <p:sp>
+        <p:nvSpPr>
+          <p:cNvPr id="3" name="Text 1"/>
+          <p:cNvSpPr/>
+          <p:nvPr/>
+        </p:nvSpPr>
+        <p:spPr>
+          <a:xfrm>
+            <a:off x="406301" y="457051"/>
+            <a:ext cx="8498026" cy="274290"/>
+          </a:xfrm>
+          <a:prstGeom prst="rect">
+            <a:avLst/>
+          </a:prstGeom>
+          <a:noFill/>
+          <a:ln/>
+        </p:spPr>
+        <p:txBody>
+          <a:bodyPr wrap="square" lIns="0" tIns="0" rIns="0" bIns="0" rtlCol="0" anchor="t"/>
+          <a:lstStyle/>
+          <a:p>
+            <a:pPr algn="l" indent="0" marL="0">
+              <a:lnSpc>
+                <a:spcPts val="2160"/>
+              </a:lnSpc>
+              <a:spcBef>
+                <a:spcPts val="600"/>
+              </a:spcBef>
+              <a:spcAft>
+                <a:spcPts val="800"/>
+              </a:spcAft>
+              <a:buNone/>
+            </a:pPr>
+            <a:r>
+              <a:rPr lang="en-US" sz="1800" b="1" dirty="0">
+                <a:solidFill>
+                  <a:srgbClr val="997929"/>
+                </a:solidFill>
+                <a:latin typeface="Times New Roman" pitchFamily="34" charset="0"/>
+                <a:ea typeface="Times New Roman" pitchFamily="34" charset="-122"/>
+                <a:cs typeface="Times New Roman" pitchFamily="34" charset="-120"/>
+              </a:rPr>
+              <a:t>Teacher notes</a:t>
+            </a:r>
+            <a:endParaRPr lang="en-US" sz="1800" dirty="0"/>
+          </a:p>
+        </p:txBody>
+      </p:sp>
+      <p:sp>
+        <p:nvSpPr>
+          <p:cNvPr id="4" name="Text 2"/>
+          <p:cNvSpPr/>
+          <p:nvPr/>
+        </p:nvSpPr>
+        <p:spPr>
+          <a:xfrm>
+            <a:off x="634901" y="883593"/>
+            <a:ext cx="8102798" cy="731341"/>
+          </a:xfrm>
+          <a:prstGeom prst="rect">
+            <a:avLst/>
+          </a:prstGeom>
+          <a:noFill/>
+          <a:ln/>
+        </p:spPr>
+        <p:txBody>
+          <a:bodyPr wrap="square" lIns="0" tIns="0" rIns="0" bIns="0" rtlCol="0" anchor="t"/>
+          <a:lstStyle/>
+          <a:p>
+            <a:pPr algn="l" marL="342900" indent="-342900">
+              <a:lnSpc>
+                <a:spcPts val="1620"/>
+              </a:lnSpc>
+              <a:spcAft>
+                <a:spcPts val="300"/>
+              </a:spcAft>
+              <a:buSzPct val="100000"/>
+              <a:buChar char="•"/>
+            </a:pPr>
+            <a:r>
+              <a:rPr lang="en-US" sz="1200" dirty="0">
+                <a:solidFill>
+                  <a:srgbClr val="1A1A1A"/>
+                </a:solidFill>
+                <a:latin typeface="Georgia" pitchFamily="34" charset="0"/>
+                <a:ea typeface="Georgia" pitchFamily="34" charset="-122"/>
+                <a:cs typeface="Georgia" pitchFamily="34" charset="-120"/>
+              </a:rPr>
+              <a:t>Citations: at least one quoted verse with citation per module. Day 1 already includes one if applicable; you may add more.</a:t>
+            </a:r>
+            <a:endParaRPr lang="en-US" sz="1200" dirty="0"/>
+          </a:p>
+          <a:p>
+            <a:pPr algn="l" marL="342900" indent="-342900">
+              <a:lnSpc>
+                <a:spcPts val="1620"/>
+              </a:lnSpc>
+              <a:spcAft>
+                <a:spcPts val="300"/>
+              </a:spcAft>
+              <a:buSzPct val="100000"/>
+              <a:buChar char="•"/>
+            </a:pPr>
+            <a:r>
+              <a:rPr lang="en-US" sz="1200" dirty="0">
+                <a:solidFill>
+                  <a:srgbClr val="1A1A1A"/>
+                </a:solidFill>
+                <a:latin typeface="Georgia" pitchFamily="34" charset="0"/>
+                <a:ea typeface="Georgia" pitchFamily="34" charset="-122"/>
+                <a:cs typeface="Georgia" pitchFamily="34" charset="-120"/>
+              </a:rPr>
+              <a:t>Connect to prior modules where natural (especially Module 2 pañcabhūta).</a:t>
             </a:r>
             <a:endParaRPr lang="en-US" sz="1200" dirty="0"/>
           </a:p>
@@ -2725,7 +4029,7 @@
                 <a:ea typeface="Times New Roman" pitchFamily="34" charset="-122"/>
                 <a:cs typeface="Times New Roman" pitchFamily="34" charset="-120"/>
               </a:rPr>
-              <a:t>Materials</a:t>
+              <a:t>Learning objective</a:t>
             </a:r>
             <a:endParaRPr lang="en-US" sz="1800" dirty="0"/>
           </a:p>
@@ -2773,7 +4077,7 @@
                 <a:ea typeface="Georgia" pitchFamily="34" charset="-122"/>
                 <a:cs typeface="Georgia" pitchFamily="34" charset="-120"/>
               </a:rPr>
-              <a:t>– Whiteboard / chart paper – Notebook, pen per student</a:t>
+              <a:t>By the end of this lesson, students will: recognise when traditional long multiplication is faster than the sūtra method.</a:t>
             </a:r>
             <a:endParaRPr lang="en-US" sz="1200" dirty="0"/>
           </a:p>
@@ -2782,52 +4086,6 @@
       <p:sp>
         <p:nvSpPr>
           <p:cNvPr id="5" name="Text 3"/>
-          <p:cNvSpPr/>
-          <p:nvPr/>
-        </p:nvSpPr>
-        <p:spPr>
-          <a:xfrm>
-            <a:off x="634901" y="1173063"/>
-            <a:ext cx="8102798" cy="281880"/>
-          </a:xfrm>
-          <a:prstGeom prst="rect">
-            <a:avLst/>
-          </a:prstGeom>
-          <a:noFill/>
-          <a:ln/>
-        </p:spPr>
-        <p:txBody>
-          <a:bodyPr wrap="square" lIns="0" tIns="0" rIns="0" bIns="0" rtlCol="0" anchor="t"/>
-          <a:lstStyle/>
-          <a:p>
-            <a:pPr algn="l" marL="342900" indent="-342900">
-              <a:lnSpc>
-                <a:spcPts val="1620"/>
-              </a:lnSpc>
-              <a:spcAft>
-                <a:spcPts val="300"/>
-              </a:spcAft>
-              <a:buSzPct val="100000"/>
-              <a:buChar char="•"/>
-            </a:pPr>
-            <a:r>
-              <a:rPr lang="en-US" sz="1200" dirty="0">
-                <a:solidFill>
-                  <a:srgbClr val="1A1A1A"/>
-                </a:solidFill>
-                <a:latin typeface="Georgia" pitchFamily="34" charset="0"/>
-                <a:ea typeface="Georgia" pitchFamily="34" charset="-122"/>
-                <a:cs typeface="Georgia" pitchFamily="34" charset="-120"/>
-              </a:rPr>
-              <a:t>(See lesson-plan.md for any day-specific materials)</a:t>
-            </a:r>
-            <a:endParaRPr lang="en-US" sz="1200" dirty="0"/>
-          </a:p>
-        </p:txBody>
-      </p:sp>
-      <p:sp>
-        <p:nvSpPr>
-          <p:cNvPr id="6" name="Text 4"/>
           <p:cNvSpPr/>
           <p:nvPr/>
         </p:nvSpPr>
@@ -2977,7 +4235,7 @@
                 <a:ea typeface="Times New Roman" pitchFamily="34" charset="-122"/>
                 <a:cs typeface="Times New Roman" pitchFamily="34" charset="-120"/>
               </a:rPr>
-              <a:t>Vocabulary introduced today</a:t>
+              <a:t>Materials</a:t>
             </a:r>
             <a:endParaRPr lang="en-US" sz="1800" dirty="0"/>
           </a:p>
@@ -2992,7 +4250,7 @@
         <p:spPr>
           <a:xfrm>
             <a:off x="634901" y="883593"/>
-            <a:ext cx="8102798" cy="281880"/>
+            <a:ext cx="8102798" cy="769441"/>
           </a:xfrm>
           <a:prstGeom prst="rect">
             <a:avLst/>
@@ -3015,24 +4273,28 @@
               <a:buChar char="•"/>
             </a:pPr>
             <a:r>
-              <a:rPr lang="en-US" sz="1200" i="1" dirty="0">
-                <a:solidFill>
-                  <a:srgbClr val="1A1A1A"/>
-                </a:solidFill>
-                <a:latin typeface="Georgia" pitchFamily="34" charset="0"/>
-                <a:ea typeface="Georgia" pitchFamily="34" charset="-122"/>
-                <a:cs typeface="Georgia" pitchFamily="34" charset="-120"/>
-              </a:rPr>
-              <a:t>Ekādhikena Pūrveṇa</a:t>
-            </a:r>
-            <a:pPr algn="l" indent="0" marL="0">
+              <a:rPr lang="en-US" sz="1200" dirty="0">
+                <a:solidFill>
+                  <a:srgbClr val="1A1A1A"/>
+                </a:solidFill>
+                <a:latin typeface="Georgia" pitchFamily="34" charset="0"/>
+                <a:ea typeface="Georgia" pitchFamily="34" charset="-122"/>
+                <a:cs typeface="Georgia" pitchFamily="34" charset="-120"/>
+              </a:rPr>
+              <a:t>Whiteboard / chart paper</a:t>
+            </a:r>
+            <a:endParaRPr lang="en-US" sz="1200" dirty="0"/>
+          </a:p>
+          <a:p>
+            <a:pPr algn="l" marL="342900" indent="-342900">
               <a:lnSpc>
                 <a:spcPts val="1620"/>
               </a:lnSpc>
               <a:spcAft>
                 <a:spcPts val="300"/>
               </a:spcAft>
-              <a:buNone/>
+              <a:buSzPct val="100000"/>
+              <a:buChar char="•"/>
             </a:pPr>
             <a:r>
               <a:rPr lang="en-US" sz="1200" dirty="0">
@@ -3043,7 +4305,31 @@
                 <a:ea typeface="Georgia" pitchFamily="34" charset="-122"/>
                 <a:cs typeface="Georgia" pitchFamily="34" charset="-120"/>
               </a:rPr>
-              <a:t> (IAST: Ekādhikena Pūrveṇa; lit. ""by one more than the previous" — sūtra 1 in Tirthaji")</a:t>
+              <a:t>Notebook, pen per student</a:t>
+            </a:r>
+            <a:endParaRPr lang="en-US" sz="1200" dirty="0"/>
+          </a:p>
+          <a:p>
+            <a:pPr algn="l" marL="342900" indent="-342900">
+              <a:lnSpc>
+                <a:spcPts val="1620"/>
+              </a:lnSpc>
+              <a:spcAft>
+                <a:spcPts val="300"/>
+              </a:spcAft>
+              <a:buSzPct val="100000"/>
+              <a:buChar char="•"/>
+            </a:pPr>
+            <a:r>
+              <a:rPr lang="en-US" sz="1200" dirty="0">
+                <a:solidFill>
+                  <a:srgbClr val="1A1A1A"/>
+                </a:solidFill>
+                <a:latin typeface="Georgia" pitchFamily="34" charset="0"/>
+                <a:ea typeface="Georgia" pitchFamily="34" charset="-122"/>
+                <a:cs typeface="Georgia" pitchFamily="34" charset="-120"/>
+              </a:rPr>
+              <a:t>(See lesson-plan.md for any day-specific materials)</a:t>
             </a:r>
             <a:endParaRPr lang="en-US" sz="1200" dirty="0"/>
           </a:p>
@@ -3201,7 +4487,7 @@
                 <a:ea typeface="Times New Roman" pitchFamily="34" charset="-122"/>
                 <a:cs typeface="Times New Roman" pitchFamily="34" charset="-120"/>
               </a:rPr>
-              <a:t>Lesson flow</a:t>
+              <a:t>Vocabulary introduced today</a:t>
             </a:r>
             <a:endParaRPr lang="en-US" sz="1800" dirty="0"/>
           </a:p>
@@ -3210,6 +4496,72 @@
       <p:sp>
         <p:nvSpPr>
           <p:cNvPr id="4" name="Text 2"/>
+          <p:cNvSpPr/>
+          <p:nvPr/>
+        </p:nvSpPr>
+        <p:spPr>
+          <a:xfrm>
+            <a:off x="634901" y="883593"/>
+            <a:ext cx="8102798" cy="281880"/>
+          </a:xfrm>
+          <a:prstGeom prst="rect">
+            <a:avLst/>
+          </a:prstGeom>
+          <a:noFill/>
+          <a:ln/>
+        </p:spPr>
+        <p:txBody>
+          <a:bodyPr wrap="square" lIns="0" tIns="0" rIns="0" bIns="0" rtlCol="0" anchor="t"/>
+          <a:lstStyle/>
+          <a:p>
+            <a:pPr algn="l" marL="342900" indent="-342900">
+              <a:lnSpc>
+                <a:spcPts val="1620"/>
+              </a:lnSpc>
+              <a:spcAft>
+                <a:spcPts val="300"/>
+              </a:spcAft>
+              <a:buSzPct val="100000"/>
+              <a:buChar char="•"/>
+            </a:pPr>
+            <a:r>
+              <a:rPr lang="en-US" sz="1200" i="1" dirty="0">
+                <a:solidFill>
+                  <a:srgbClr val="1A1A1A"/>
+                </a:solidFill>
+                <a:latin typeface="Georgia" pitchFamily="34" charset="0"/>
+                <a:ea typeface="Georgia" pitchFamily="34" charset="-122"/>
+                <a:cs typeface="Georgia" pitchFamily="34" charset="-120"/>
+              </a:rPr>
+              <a:t>Ekādhikena Pūrveṇa</a:t>
+            </a:r>
+            <a:pPr algn="l" indent="0" marL="0">
+              <a:lnSpc>
+                <a:spcPts val="1620"/>
+              </a:lnSpc>
+              <a:spcAft>
+                <a:spcPts val="300"/>
+              </a:spcAft>
+              <a:buNone/>
+            </a:pPr>
+            <a:r>
+              <a:rPr lang="en-US" sz="1200" dirty="0">
+                <a:solidFill>
+                  <a:srgbClr val="1A1A1A"/>
+                </a:solidFill>
+                <a:latin typeface="Georgia" pitchFamily="34" charset="0"/>
+                <a:ea typeface="Georgia" pitchFamily="34" charset="-122"/>
+                <a:cs typeface="Georgia" pitchFamily="34" charset="-120"/>
+              </a:rPr>
+              <a:t> (IAST: Ekādhikena Pūrveṇa; lit. ""by one more than the previous" — sūtra 1 in Tirthaji")</a:t>
+            </a:r>
+            <a:endParaRPr lang="en-US" sz="1200" dirty="0"/>
+          </a:p>
+        </p:txBody>
+      </p:sp>
+      <p:sp>
+        <p:nvSpPr>
+          <p:cNvPr id="5" name="Text 3"/>
           <p:cNvSpPr/>
           <p:nvPr/>
         </p:nvSpPr>
@@ -3359,7 +4711,7 @@
                 <a:ea typeface="Times New Roman" pitchFamily="34" charset="-122"/>
                 <a:cs typeface="Times New Roman" pitchFamily="34" charset="-120"/>
               </a:rPr>
-              <a:t>Warm-up (5 min)</a:t>
+              <a:t>Lesson flow</a:t>
             </a:r>
             <a:endParaRPr lang="en-US" sz="1800" dirty="0"/>
           </a:p>
@@ -3368,100 +4720,6 @@
       <p:sp>
         <p:nvSpPr>
           <p:cNvPr id="4" name="Text 2"/>
-          <p:cNvSpPr/>
-          <p:nvPr/>
-        </p:nvSpPr>
-        <p:spPr>
-          <a:xfrm>
-            <a:off x="406301" y="870942"/>
-            <a:ext cx="8498026" cy="426541"/>
-          </a:xfrm>
-          <a:prstGeom prst="rect">
-            <a:avLst/>
-          </a:prstGeom>
-          <a:noFill/>
-          <a:ln/>
-        </p:spPr>
-        <p:txBody>
-          <a:bodyPr wrap="square" lIns="0" tIns="0" rIns="0" bIns="0" rtlCol="0" anchor="t"/>
-          <a:lstStyle/>
-          <a:p>
-            <a:pPr algn="l" indent="0" marL="0">
-              <a:lnSpc>
-                <a:spcPts val="1680"/>
-              </a:lnSpc>
-              <a:spcBef>
-                <a:spcPts val="300"/>
-              </a:spcBef>
-              <a:spcAft>
-                <a:spcPts val="300"/>
-              </a:spcAft>
-              <a:buNone/>
-            </a:pPr>
-            <a:r>
-              <a:rPr lang="en-US" sz="1200" dirty="0">
-                <a:solidFill>
-                  <a:srgbClr val="1A1A1A"/>
-                </a:solidFill>
-                <a:latin typeface="Georgia" pitchFamily="34" charset="0"/>
-                <a:ea typeface="Georgia" pitchFamily="34" charset="-122"/>
-                <a:cs typeface="Georgia" pitchFamily="34" charset="-120"/>
-              </a:rPr>
-              <a:t>– Daily check-in: one-sentence response to </a:t>
-            </a:r>
-            <a:pPr algn="l" indent="0" marL="0">
-              <a:lnSpc>
-                <a:spcPts val="1680"/>
-              </a:lnSpc>
-              <a:spcBef>
-                <a:spcPts val="300"/>
-              </a:spcBef>
-              <a:spcAft>
-                <a:spcPts val="300"/>
-              </a:spcAft>
-              <a:buNone/>
-            </a:pPr>
-            <a:r>
-              <a:rPr lang="en-US" sz="1200" i="1" dirty="0">
-                <a:solidFill>
-                  <a:srgbClr val="1A1A1A"/>
-                </a:solidFill>
-                <a:latin typeface="Georgia" pitchFamily="34" charset="0"/>
-                <a:ea typeface="Georgia" pitchFamily="34" charset="-122"/>
-                <a:cs typeface="Georgia" pitchFamily="34" charset="-120"/>
-              </a:rPr>
-              <a:t>"What's one thing you remember about yesterday's lesson?"</a:t>
-            </a:r>
-            <a:pPr algn="l" indent="0" marL="0">
-              <a:lnSpc>
-                <a:spcPts val="1680"/>
-              </a:lnSpc>
-              <a:spcBef>
-                <a:spcPts val="300"/>
-              </a:spcBef>
-              <a:spcAft>
-                <a:spcPts val="300"/>
-              </a:spcAft>
-              <a:buNone/>
-            </a:pPr>
-            <a:r>
-              <a:rPr lang="en-US" sz="1200" dirty="0">
-                <a:solidFill>
-                  <a:srgbClr val="1A1A1A"/>
-                </a:solidFill>
-                <a:latin typeface="Georgia" pitchFamily="34" charset="0"/>
-                <a:ea typeface="Georgia" pitchFamily="34" charset="-122"/>
-                <a:cs typeface="Georgia" pitchFamily="34" charset="-120"/>
-              </a:rPr>
-              <a:t> – Hook: introduce a phenomenon or question that motivates today's concept.</a:t>
-            </a:r>
-            <a:endParaRPr lang="en-US" sz="1200" dirty="0"/>
-          </a:p>
-        </p:txBody>
-      </p:sp>
-      <p:sp>
-        <p:nvSpPr>
-          <p:cNvPr id="5" name="Text 3"/>
           <p:cNvSpPr/>
           <p:nvPr/>
         </p:nvSpPr>
@@ -3611,7 +4869,7 @@
                 <a:ea typeface="Times New Roman" pitchFamily="34" charset="-122"/>
                 <a:cs typeface="Times New Roman" pitchFamily="34" charset="-120"/>
               </a:rPr>
-              <a:t>Core (20 min)</a:t>
+              <a:t>Warm-up (5 min)</a:t>
             </a:r>
             <a:endParaRPr lang="en-US" sz="1800" dirty="0"/>
           </a:p>
@@ -3626,7 +4884,7 @@
         <p:spPr>
           <a:xfrm>
             <a:off x="634901" y="883593"/>
-            <a:ext cx="8102798" cy="487561"/>
+            <a:ext cx="8102798" cy="525661"/>
           </a:xfrm>
           <a:prstGeom prst="rect">
             <a:avLst/>
@@ -3649,15 +4907,15 @@
               <a:buChar char="•"/>
             </a:pPr>
             <a:r>
-              <a:rPr lang="en-US" sz="1200" b="1" dirty="0">
-                <a:solidFill>
-                  <a:srgbClr val="1A1A1A"/>
-                </a:solidFill>
-                <a:latin typeface="Georgia" pitchFamily="34" charset="0"/>
-                <a:ea typeface="Georgia" pitchFamily="34" charset="-122"/>
-                <a:cs typeface="Georgia" pitchFamily="34" charset="-120"/>
-              </a:rPr>
-              <a:t>Pose the question.</a:t>
+              <a:rPr lang="en-US" sz="1200" dirty="0">
+                <a:solidFill>
+                  <a:srgbClr val="1A1A1A"/>
+                </a:solidFill>
+                <a:latin typeface="Georgia" pitchFamily="34" charset="0"/>
+                <a:ea typeface="Georgia" pitchFamily="34" charset="-122"/>
+                <a:cs typeface="Georgia" pitchFamily="34" charset="-120"/>
+              </a:rPr>
+              <a:t>Daily check-in: one-sentence response to </a:t>
             </a:r>
             <a:pPr algn="l" indent="0" marL="0">
               <a:lnSpc>
@@ -3669,26 +4927,6 @@
               <a:buNone/>
             </a:pPr>
             <a:r>
-              <a:rPr lang="en-US" sz="1200" dirty="0">
-                <a:solidFill>
-                  <a:srgbClr val="1A1A1A"/>
-                </a:solidFill>
-                <a:latin typeface="Georgia" pitchFamily="34" charset="0"/>
-                <a:ea typeface="Georgia" pitchFamily="34" charset="-122"/>
-                <a:cs typeface="Georgia" pitchFamily="34" charset="-120"/>
-              </a:rPr>
-              <a:t> </a:t>
-            </a:r>
-            <a:pPr algn="l" indent="0" marL="0">
-              <a:lnSpc>
-                <a:spcPts val="1620"/>
-              </a:lnSpc>
-              <a:spcAft>
-                <a:spcPts val="300"/>
-              </a:spcAft>
-              <a:buNone/>
-            </a:pPr>
-            <a:r>
               <a:rPr lang="en-US" sz="1200" i="1" dirty="0">
                 <a:solidFill>
                   <a:srgbClr val="1A1A1A"/>
@@ -3697,32 +4935,10 @@
                 <a:ea typeface="Georgia" pitchFamily="34" charset="-122"/>
                 <a:cs typeface="Georgia" pitchFamily="34" charset="-120"/>
               </a:rPr>
-              <a:t>"When IS the ×11 (or near-base) method genuinely faster than traditional long multiplication? When is it the SAME or SLOWER?"</a:t>
+              <a:t>"What's one thing you remember about yesterday's lesson?"</a:t>
             </a:r>
             <a:endParaRPr lang="en-US" sz="1200" dirty="0"/>
           </a:p>
-        </p:txBody>
-      </p:sp>
-      <p:sp>
-        <p:nvSpPr>
-          <p:cNvPr id="5" name="Text 3"/>
-          <p:cNvSpPr/>
-          <p:nvPr/>
-        </p:nvSpPr>
-        <p:spPr>
-          <a:xfrm>
-            <a:off x="634901" y="1472654"/>
-            <a:ext cx="8102798" cy="281880"/>
-          </a:xfrm>
-          <a:prstGeom prst="rect">
-            <a:avLst/>
-          </a:prstGeom>
-          <a:noFill/>
-          <a:ln/>
-        </p:spPr>
-        <p:txBody>
-          <a:bodyPr wrap="square" lIns="0" tIns="0" rIns="0" bIns="0" rtlCol="0" anchor="t"/>
-          <a:lstStyle/>
           <a:p>
             <a:pPr algn="l" marL="342900" indent="-342900">
               <a:lnSpc>
@@ -3735,15 +4951,15 @@
               <a:buChar char="•"/>
             </a:pPr>
             <a:r>
-              <a:rPr lang="en-US" sz="1200" b="1" dirty="0">
-                <a:solidFill>
-                  <a:srgbClr val="1A1A1A"/>
-                </a:solidFill>
-                <a:latin typeface="Georgia" pitchFamily="34" charset="0"/>
-                <a:ea typeface="Georgia" pitchFamily="34" charset="-122"/>
-                <a:cs typeface="Georgia" pitchFamily="34" charset="-120"/>
-              </a:rPr>
-              <a:t>Categorise problem types.</a:t>
+              <a:rPr lang="en-US" sz="1200" dirty="0">
+                <a:solidFill>
+                  <a:srgbClr val="1A1A1A"/>
+                </a:solidFill>
+                <a:latin typeface="Georgia" pitchFamily="34" charset="0"/>
+                <a:ea typeface="Georgia" pitchFamily="34" charset="-122"/>
+                <a:cs typeface="Georgia" pitchFamily="34" charset="-120"/>
+              </a:rPr>
+              <a:t>Hook: introduce a phenomenon or question that motivates today's concept.</a:t>
             </a:r>
             <a:endParaRPr lang="en-US" sz="1200" dirty="0"/>
           </a:p>
@@ -3751,373 +4967,7 @@
       </p:sp>
       <p:sp>
         <p:nvSpPr>
-          <p:cNvPr id="6" name="Text 4"/>
-          <p:cNvSpPr/>
-          <p:nvPr/>
-        </p:nvSpPr>
-        <p:spPr>
-          <a:xfrm>
-            <a:off x="406301" y="1843385"/>
-            <a:ext cx="8498026" cy="426541"/>
-          </a:xfrm>
-          <a:prstGeom prst="rect">
-            <a:avLst/>
-          </a:prstGeom>
-          <a:noFill/>
-          <a:ln/>
-        </p:spPr>
-        <p:txBody>
-          <a:bodyPr wrap="square" lIns="0" tIns="0" rIns="0" bIns="0" rtlCol="0" anchor="t"/>
-          <a:lstStyle/>
-          <a:p>
-            <a:pPr algn="l" indent="0" marL="0">
-              <a:lnSpc>
-                <a:spcPts val="1680"/>
-              </a:lnSpc>
-              <a:spcBef>
-                <a:spcPts val="300"/>
-              </a:spcBef>
-              <a:spcAft>
-                <a:spcPts val="300"/>
-              </a:spcAft>
-              <a:buNone/>
-            </a:pPr>
-            <a:r>
-              <a:rPr lang="en-US" sz="1200" dirty="0">
-                <a:solidFill>
-                  <a:srgbClr val="1A1A1A"/>
-                </a:solidFill>
-                <a:latin typeface="Georgia" pitchFamily="34" charset="0"/>
-                <a:ea typeface="Georgia" pitchFamily="34" charset="-122"/>
-                <a:cs typeface="Georgia" pitchFamily="34" charset="-120"/>
-              </a:rPr>
-              <a:t>– 2-digit × 11 — much faster.    – 3-digit × 11 — somewhat faster.    – 2-digit × 12–19 — comparable.    – 2-digit × 23 (far from base) — long multiplication is faster.    – Long multi-digit products — long multiplication or scientific notation is best.</a:t>
-            </a:r>
-            <a:endParaRPr lang="en-US" sz="1200" dirty="0"/>
-          </a:p>
-        </p:txBody>
-      </p:sp>
-      <p:sp>
-        <p:nvSpPr>
-          <p:cNvPr id="7" name="Text 5"/>
-          <p:cNvSpPr/>
-          <p:nvPr/>
-        </p:nvSpPr>
-        <p:spPr>
-          <a:xfrm>
-            <a:off x="634901" y="2358777"/>
-            <a:ext cx="8102798" cy="487561"/>
-          </a:xfrm>
-          <a:prstGeom prst="rect">
-            <a:avLst/>
-          </a:prstGeom>
-          <a:noFill/>
-          <a:ln/>
-        </p:spPr>
-        <p:txBody>
-          <a:bodyPr wrap="square" lIns="0" tIns="0" rIns="0" bIns="0" rtlCol="0" anchor="t"/>
-          <a:lstStyle/>
-          <a:p>
-            <a:pPr algn="l" marL="342900" indent="-342900">
-              <a:lnSpc>
-                <a:spcPts val="1620"/>
-              </a:lnSpc>
-              <a:spcAft>
-                <a:spcPts val="300"/>
-              </a:spcAft>
-              <a:buSzPct val="100000"/>
-              <a:buChar char="•"/>
-            </a:pPr>
-            <a:r>
-              <a:rPr lang="en-US" sz="1200" b="1" dirty="0">
-                <a:solidFill>
-                  <a:srgbClr val="1A1A1A"/>
-                </a:solidFill>
-                <a:latin typeface="Georgia" pitchFamily="34" charset="0"/>
-                <a:ea typeface="Georgia" pitchFamily="34" charset="-122"/>
-                <a:cs typeface="Georgia" pitchFamily="34" charset="-120"/>
-              </a:rPr>
-              <a:t>Honest framing.</a:t>
-            </a:r>
-            <a:pPr algn="l" indent="0" marL="0">
-              <a:lnSpc>
-                <a:spcPts val="1620"/>
-              </a:lnSpc>
-              <a:spcAft>
-                <a:spcPts val="300"/>
-              </a:spcAft>
-              <a:buNone/>
-            </a:pPr>
-            <a:r>
-              <a:rPr lang="en-US" sz="1200" dirty="0">
-                <a:solidFill>
-                  <a:srgbClr val="1A1A1A"/>
-                </a:solidFill>
-                <a:latin typeface="Georgia" pitchFamily="34" charset="0"/>
-                <a:ea typeface="Georgia" pitchFamily="34" charset="-122"/>
-                <a:cs typeface="Georgia" pitchFamily="34" charset="-120"/>
-              </a:rPr>
-              <a:t> Tirthaji's sūtras are not a universal speed-up. They are a </a:t>
-            </a:r>
-            <a:pPr algn="l" indent="0" marL="0">
-              <a:lnSpc>
-                <a:spcPts val="1620"/>
-              </a:lnSpc>
-              <a:spcAft>
-                <a:spcPts val="300"/>
-              </a:spcAft>
-              <a:buNone/>
-            </a:pPr>
-            <a:r>
-              <a:rPr lang="en-US" sz="1200" i="1" dirty="0">
-                <a:solidFill>
-                  <a:srgbClr val="1A1A1A"/>
-                </a:solidFill>
-                <a:latin typeface="Georgia" pitchFamily="34" charset="0"/>
-                <a:ea typeface="Georgia" pitchFamily="34" charset="-122"/>
-                <a:cs typeface="Georgia" pitchFamily="34" charset="-120"/>
-              </a:rPr>
-              <a:t>toolbox of mental shortcuts for specific patterns</a:t>
-            </a:r>
-            <a:pPr algn="l" indent="0" marL="0">
-              <a:lnSpc>
-                <a:spcPts val="1620"/>
-              </a:lnSpc>
-              <a:spcAft>
-                <a:spcPts val="300"/>
-              </a:spcAft>
-              <a:buNone/>
-            </a:pPr>
-            <a:r>
-              <a:rPr lang="en-US" sz="1200" dirty="0">
-                <a:solidFill>
-                  <a:srgbClr val="1A1A1A"/>
-                </a:solidFill>
-                <a:latin typeface="Georgia" pitchFamily="34" charset="0"/>
-                <a:ea typeface="Georgia" pitchFamily="34" charset="-122"/>
-                <a:cs typeface="Georgia" pitchFamily="34" charset="-120"/>
-              </a:rPr>
-              <a:t>. The skill is recognising when to use which tool.</a:t>
-            </a:r>
-            <a:endParaRPr lang="en-US" sz="1200" dirty="0"/>
-          </a:p>
-        </p:txBody>
-      </p:sp>
-      <p:sp>
-        <p:nvSpPr>
-          <p:cNvPr id="8" name="Text 6"/>
-          <p:cNvSpPr/>
-          <p:nvPr/>
-        </p:nvSpPr>
-        <p:spPr>
-          <a:xfrm>
-            <a:off x="634901" y="2947839"/>
-            <a:ext cx="8102798" cy="693241"/>
-          </a:xfrm>
-          <a:prstGeom prst="rect">
-            <a:avLst/>
-          </a:prstGeom>
-          <a:noFill/>
-          <a:ln/>
-        </p:spPr>
-        <p:txBody>
-          <a:bodyPr wrap="square" lIns="0" tIns="0" rIns="0" bIns="0" rtlCol="0" anchor="t"/>
-          <a:lstStyle/>
-          <a:p>
-            <a:pPr algn="l" marL="342900" indent="-342900">
-              <a:lnSpc>
-                <a:spcPts val="1620"/>
-              </a:lnSpc>
-              <a:spcAft>
-                <a:spcPts val="300"/>
-              </a:spcAft>
-              <a:buSzPct val="100000"/>
-              <a:buChar char="•"/>
-            </a:pPr>
-            <a:r>
-              <a:rPr lang="en-US" sz="1200" b="1" dirty="0">
-                <a:solidFill>
-                  <a:srgbClr val="1A1A1A"/>
-                </a:solidFill>
-                <a:latin typeface="Georgia" pitchFamily="34" charset="0"/>
-                <a:ea typeface="Georgia" pitchFamily="34" charset="-122"/>
-                <a:cs typeface="Georgia" pitchFamily="34" charset="-120"/>
-              </a:rPr>
-              <a:t>Reference.</a:t>
-            </a:r>
-            <a:pPr algn="l" indent="0" marL="0">
-              <a:lnSpc>
-                <a:spcPts val="1620"/>
-              </a:lnSpc>
-              <a:spcAft>
-                <a:spcPts val="300"/>
-              </a:spcAft>
-              <a:buNone/>
-            </a:pPr>
-            <a:r>
-              <a:rPr lang="en-US" sz="1200" dirty="0">
-                <a:solidFill>
-                  <a:srgbClr val="1A1A1A"/>
-                </a:solidFill>
-                <a:latin typeface="Georgia" pitchFamily="34" charset="0"/>
-                <a:ea typeface="Georgia" pitchFamily="34" charset="-122"/>
-                <a:cs typeface="Georgia" pitchFamily="34" charset="-120"/>
-              </a:rPr>
-              <a:t> Modern mathematicians (S.G. Dani, 1993; Kim Plofker, </a:t>
-            </a:r>
-            <a:pPr algn="l" indent="0" marL="0">
-              <a:lnSpc>
-                <a:spcPts val="1620"/>
-              </a:lnSpc>
-              <a:spcAft>
-                <a:spcPts val="300"/>
-              </a:spcAft>
-              <a:buNone/>
-            </a:pPr>
-            <a:r>
-              <a:rPr lang="en-US" sz="1200" i="1" dirty="0">
-                <a:solidFill>
-                  <a:srgbClr val="1A1A1A"/>
-                </a:solidFill>
-                <a:latin typeface="Georgia" pitchFamily="34" charset="0"/>
-                <a:ea typeface="Georgia" pitchFamily="34" charset="-122"/>
-                <a:cs typeface="Georgia" pitchFamily="34" charset="-120"/>
-              </a:rPr>
-              <a:t>Mathematics in India</a:t>
-            </a:r>
-            <a:pPr algn="l" indent="0" marL="0">
-              <a:lnSpc>
-                <a:spcPts val="1620"/>
-              </a:lnSpc>
-              <a:spcAft>
-                <a:spcPts val="300"/>
-              </a:spcAft>
-              <a:buNone/>
-            </a:pPr>
-            <a:r>
-              <a:rPr lang="en-US" sz="1200" dirty="0">
-                <a:solidFill>
-                  <a:srgbClr val="1A1A1A"/>
-                </a:solidFill>
-                <a:latin typeface="Georgia" pitchFamily="34" charset="0"/>
-                <a:ea typeface="Georgia" pitchFamily="34" charset="-122"/>
-                <a:cs typeface="Georgia" pitchFamily="34" charset="-120"/>
-              </a:rPr>
-              <a:t>, 2009) have written critically about the "Vedic" claim and pedagogically about the methods. Read Dani's </a:t>
-            </a:r>
-            <a:pPr algn="l" indent="0" marL="0">
-              <a:lnSpc>
-                <a:spcPts val="1620"/>
-              </a:lnSpc>
-              <a:spcAft>
-                <a:spcPts val="300"/>
-              </a:spcAft>
-              <a:buNone/>
-            </a:pPr>
-            <a:r>
-              <a:rPr lang="en-US" sz="1200" i="1" dirty="0">
-                <a:solidFill>
-                  <a:srgbClr val="1A1A1A"/>
-                </a:solidFill>
-                <a:latin typeface="Georgia" pitchFamily="34" charset="0"/>
-                <a:ea typeface="Georgia" pitchFamily="34" charset="-122"/>
-                <a:cs typeface="Georgia" pitchFamily="34" charset="-120"/>
-              </a:rPr>
-              <a:t>Frontline</a:t>
-            </a:r>
-            <a:pPr algn="l" indent="0" marL="0">
-              <a:lnSpc>
-                <a:spcPts val="1620"/>
-              </a:lnSpc>
-              <a:spcAft>
-                <a:spcPts val="300"/>
-              </a:spcAft>
-              <a:buNone/>
-            </a:pPr>
-            <a:r>
-              <a:rPr lang="en-US" sz="1200" dirty="0">
-                <a:solidFill>
-                  <a:srgbClr val="1A1A1A"/>
-                </a:solidFill>
-                <a:latin typeface="Georgia" pitchFamily="34" charset="0"/>
-                <a:ea typeface="Georgia" pitchFamily="34" charset="-122"/>
-                <a:cs typeface="Georgia" pitchFamily="34" charset="-120"/>
-              </a:rPr>
-              <a:t> article excerpt aloud (one paragraph).</a:t>
-            </a:r>
-            <a:endParaRPr lang="en-US" sz="1200" dirty="0"/>
-          </a:p>
-        </p:txBody>
-      </p:sp>
-      <p:sp>
-        <p:nvSpPr>
-          <p:cNvPr id="9" name="Text 7"/>
-          <p:cNvSpPr/>
-          <p:nvPr/>
-        </p:nvSpPr>
-        <p:spPr>
-          <a:xfrm>
-            <a:off x="634901" y="3742581"/>
-            <a:ext cx="8102798" cy="487561"/>
-          </a:xfrm>
-          <a:prstGeom prst="rect">
-            <a:avLst/>
-          </a:prstGeom>
-          <a:noFill/>
-          <a:ln/>
-        </p:spPr>
-        <p:txBody>
-          <a:bodyPr wrap="square" lIns="0" tIns="0" rIns="0" bIns="0" rtlCol="0" anchor="t"/>
-          <a:lstStyle/>
-          <a:p>
-            <a:pPr algn="l" marL="342900" indent="-342900">
-              <a:lnSpc>
-                <a:spcPts val="1620"/>
-              </a:lnSpc>
-              <a:spcAft>
-                <a:spcPts val="300"/>
-              </a:spcAft>
-              <a:buSzPct val="100000"/>
-              <a:buChar char="•"/>
-            </a:pPr>
-            <a:r>
-              <a:rPr lang="en-US" sz="1200" b="1" dirty="0">
-                <a:solidFill>
-                  <a:srgbClr val="1A1A1A"/>
-                </a:solidFill>
-                <a:latin typeface="Georgia" pitchFamily="34" charset="0"/>
-                <a:ea typeface="Georgia" pitchFamily="34" charset="-122"/>
-                <a:cs typeface="Georgia" pitchFamily="34" charset="-120"/>
-              </a:rPr>
-              <a:t>Reflection.</a:t>
-            </a:r>
-            <a:pPr algn="l" indent="0" marL="0">
-              <a:lnSpc>
-                <a:spcPts val="1620"/>
-              </a:lnSpc>
-              <a:spcAft>
-                <a:spcPts val="300"/>
-              </a:spcAft>
-              <a:buNone/>
-            </a:pPr>
-            <a:r>
-              <a:rPr lang="en-US" sz="1200" dirty="0">
-                <a:solidFill>
-                  <a:srgbClr val="1A1A1A"/>
-                </a:solidFill>
-                <a:latin typeface="Georgia" pitchFamily="34" charset="0"/>
-                <a:ea typeface="Georgia" pitchFamily="34" charset="-122"/>
-                <a:cs typeface="Georgia" pitchFamily="34" charset="-120"/>
-              </a:rPr>
-              <a:t> Each student writes 3 sentences: which method-types are useful, what limits are, and where standard arithmetic remains best.</a:t>
-            </a:r>
-            <a:endParaRPr lang="en-US" sz="1200" dirty="0"/>
-          </a:p>
-        </p:txBody>
-      </p:sp>
-      <p:sp>
-        <p:nvSpPr>
-          <p:cNvPr id="10" name="Text 8"/>
+          <p:cNvPr id="5" name="Text 3"/>
           <p:cNvSpPr/>
           <p:nvPr/>
         </p:nvSpPr>
@@ -4267,7 +5117,7 @@
                 <a:ea typeface="Times New Roman" pitchFamily="34" charset="-122"/>
                 <a:cs typeface="Times New Roman" pitchFamily="34" charset="-120"/>
               </a:rPr>
-              <a:t>Activity (15 min)</a:t>
+              <a:t>Core (20 min)</a:t>
             </a:r>
             <a:endParaRPr lang="en-US" sz="1800" dirty="0"/>
           </a:p>
@@ -4281,8 +5131,8 @@
         </p:nvSpPr>
         <p:spPr>
           <a:xfrm>
-            <a:off x="406301" y="870942"/>
-            <a:ext cx="8498026" cy="436066"/>
+            <a:off x="634901" y="883593"/>
+            <a:ext cx="8102798" cy="487561"/>
           </a:xfrm>
           <a:prstGeom prst="rect">
             <a:avLst/>
@@ -4294,13 +5144,31 @@
           <a:bodyPr wrap="square" lIns="0" tIns="0" rIns="0" bIns="0" rtlCol="0" anchor="t"/>
           <a:lstStyle/>
           <a:p>
+            <a:pPr algn="l" marL="342900" indent="-342900">
+              <a:lnSpc>
+                <a:spcPts val="1620"/>
+              </a:lnSpc>
+              <a:spcAft>
+                <a:spcPts val="300"/>
+              </a:spcAft>
+              <a:buSzPct val="100000"/>
+              <a:buChar char="•"/>
+            </a:pPr>
+            <a:r>
+              <a:rPr lang="en-US" sz="1200" b="1" dirty="0">
+                <a:solidFill>
+                  <a:srgbClr val="1A1A1A"/>
+                </a:solidFill>
+                <a:latin typeface="Georgia" pitchFamily="34" charset="0"/>
+                <a:ea typeface="Georgia" pitchFamily="34" charset="-122"/>
+                <a:cs typeface="Georgia" pitchFamily="34" charset="-120"/>
+              </a:rPr>
+              <a:t>Pose the question.</a:t>
+            </a:r>
             <a:pPr algn="l" indent="0" marL="0">
               <a:lnSpc>
-                <a:spcPts val="1680"/>
-              </a:lnSpc>
-              <a:spcBef>
-                <a:spcPts val="300"/>
-              </a:spcBef>
+                <a:spcPts val="1620"/>
+              </a:lnSpc>
               <a:spcAft>
                 <a:spcPts val="300"/>
               </a:spcAft>
@@ -4315,15 +5183,12 @@
                 <a:ea typeface="Georgia" pitchFamily="34" charset="-122"/>
                 <a:cs typeface="Georgia" pitchFamily="34" charset="-120"/>
               </a:rPr>
-              <a:t>A scaled version of </a:t>
+              <a:t> </a:t>
             </a:r>
             <a:pPr algn="l" indent="0" marL="0">
               <a:lnSpc>
-                <a:spcPts val="1680"/>
-              </a:lnSpc>
-              <a:spcBef>
-                <a:spcPts val="300"/>
-              </a:spcBef>
+                <a:spcPts val="1620"/>
+              </a:lnSpc>
               <a:spcAft>
                 <a:spcPts val="300"/>
               </a:spcAft>
@@ -4338,76 +5203,7 @@
                 <a:ea typeface="Georgia" pitchFamily="34" charset="-122"/>
                 <a:cs typeface="Georgia" pitchFamily="34" charset="-120"/>
               </a:rPr>
-              <a:t>Mental Math Sprint Cards</a:t>
-            </a:r>
-            <a:pPr algn="l" indent="0" marL="0">
-              <a:lnSpc>
-                <a:spcPts val="1680"/>
-              </a:lnSpc>
-              <a:spcBef>
-                <a:spcPts val="300"/>
-              </a:spcBef>
-              <a:spcAft>
-                <a:spcPts val="300"/>
-              </a:spcAft>
-              <a:buNone/>
-            </a:pPr>
-            <a:r>
-              <a:rPr lang="en-US" sz="1200" dirty="0">
-                <a:solidFill>
-                  <a:srgbClr val="1A1A1A"/>
-                </a:solidFill>
-                <a:latin typeface="Georgia" pitchFamily="34" charset="0"/>
-                <a:ea typeface="Georgia" pitchFamily="34" charset="-122"/>
-                <a:cs typeface="Georgia" pitchFamily="34" charset="-120"/>
-              </a:rPr>
-              <a:t> (see </a:t>
-            </a:r>
-            <a:pPr algn="l" indent="0" marL="0">
-              <a:lnSpc>
-                <a:spcPts val="1680"/>
-              </a:lnSpc>
-              <a:spcBef>
-                <a:spcPts val="300"/>
-              </a:spcBef>
-              <a:spcAft>
-                <a:spcPts val="300"/>
-              </a:spcAft>
-              <a:buNone/>
-            </a:pPr>
-            <a:r>
-              <a:rPr lang="en-US" sz="1200" dirty="0">
-                <a:solidFill>
-                  <a:srgbClr val="1A1A1A"/>
-                </a:solidFill>
-                <a:latin typeface="Georgia" pitchFamily="34" charset="0"/>
-                <a:ea typeface="Georgia" pitchFamily="34" charset="-122"/>
-                <a:cs typeface="Georgia" pitchFamily="34" charset="-120"/>
-              </a:rPr>
-              <a:t>activities/</a:t>
-            </a:r>
-            <a:pPr algn="l" indent="0" marL="0">
-              <a:lnSpc>
-                <a:spcPts val="1680"/>
-              </a:lnSpc>
-              <a:spcBef>
-                <a:spcPts val="300"/>
-              </a:spcBef>
-              <a:spcAft>
-                <a:spcPts val="300"/>
-              </a:spcAft>
-              <a:buNone/>
-            </a:pPr>
-            <a:r>
-              <a:rPr lang="en-US" sz="1200" dirty="0">
-                <a:solidFill>
-                  <a:srgbClr val="1A1A1A"/>
-                </a:solidFill>
-                <a:latin typeface="Georgia" pitchFamily="34" charset="0"/>
-                <a:ea typeface="Georgia" pitchFamily="34" charset="-122"/>
-                <a:cs typeface="Georgia" pitchFamily="34" charset="-120"/>
-              </a:rPr>
-              <a:t>). Today's slice: focus on the part of the activity that reinforces Limits of the Method.</a:t>
+              <a:t>"When IS the ×11 (or near-base) method genuinely faster than traditional long multiplication? When is it the SAME or SLOWER?"</a:t>
             </a:r>
             <a:endParaRPr lang="en-US" sz="1200" dirty="0"/>
           </a:p>
@@ -4565,7 +5361,7 @@
                 <a:ea typeface="Times New Roman" pitchFamily="34" charset="-122"/>
                 <a:cs typeface="Times New Roman" pitchFamily="34" charset="-120"/>
               </a:rPr>
-              <a:t>Wrap-up (5 min)</a:t>
+              <a:t>Core (20 min) (cont.)</a:t>
             </a:r>
             <a:endParaRPr lang="en-US" sz="1800" dirty="0"/>
           </a:p>
@@ -4579,8 +5375,8 @@
         </p:nvSpPr>
         <p:spPr>
           <a:xfrm>
-            <a:off x="406301" y="870942"/>
-            <a:ext cx="8498026" cy="213271"/>
+            <a:off x="634901" y="883593"/>
+            <a:ext cx="8102798" cy="281880"/>
           </a:xfrm>
           <a:prstGeom prst="rect">
             <a:avLst/>
@@ -4592,17 +5388,61 @@
           <a:bodyPr wrap="square" lIns="0" tIns="0" rIns="0" bIns="0" rtlCol="0" anchor="t"/>
           <a:lstStyle/>
           <a:p>
-            <a:pPr algn="l" indent="0" marL="0">
-              <a:lnSpc>
-                <a:spcPts val="1680"/>
-              </a:lnSpc>
-              <a:spcBef>
-                <a:spcPts val="300"/>
-              </a:spcBef>
-              <a:spcAft>
-                <a:spcPts val="300"/>
-              </a:spcAft>
-              <a:buNone/>
+            <a:pPr algn="l" marL="342900" indent="-342900">
+              <a:lnSpc>
+                <a:spcPts val="1620"/>
+              </a:lnSpc>
+              <a:spcAft>
+                <a:spcPts val="300"/>
+              </a:spcAft>
+              <a:buSzPct val="100000"/>
+              <a:buChar char="•"/>
+            </a:pPr>
+            <a:r>
+              <a:rPr lang="en-US" sz="1200" b="1" dirty="0">
+                <a:solidFill>
+                  <a:srgbClr val="1A1A1A"/>
+                </a:solidFill>
+                <a:latin typeface="Georgia" pitchFamily="34" charset="0"/>
+                <a:ea typeface="Georgia" pitchFamily="34" charset="-122"/>
+                <a:cs typeface="Georgia" pitchFamily="34" charset="-120"/>
+              </a:rPr>
+              <a:t>Categorise problem types.</a:t>
+            </a:r>
+            <a:endParaRPr lang="en-US" sz="1200" dirty="0"/>
+          </a:p>
+        </p:txBody>
+      </p:sp>
+      <p:sp>
+        <p:nvSpPr>
+          <p:cNvPr id="5" name="Text 3"/>
+          <p:cNvSpPr/>
+          <p:nvPr/>
+        </p:nvSpPr>
+        <p:spPr>
+          <a:xfrm>
+            <a:off x="634901" y="1266974"/>
+            <a:ext cx="8102798" cy="1257002"/>
+          </a:xfrm>
+          <a:prstGeom prst="rect">
+            <a:avLst/>
+          </a:prstGeom>
+          <a:noFill/>
+          <a:ln/>
+        </p:spPr>
+        <p:txBody>
+          <a:bodyPr wrap="square" lIns="0" tIns="0" rIns="0" bIns="0" rtlCol="0" anchor="t"/>
+          <a:lstStyle/>
+          <a:p>
+            <a:pPr algn="l" marL="342900" indent="-342900">
+              <a:lnSpc>
+                <a:spcPts val="1620"/>
+              </a:lnSpc>
+              <a:spcAft>
+                <a:spcPts val="300"/>
+              </a:spcAft>
+              <a:buSzPct val="100000"/>
+              <a:buChar char="•"/>
             </a:pPr>
             <a:r>
               <a:rPr lang="en-US" sz="1200" dirty="0">
@@ -4613,42 +5453,20 @@
                 <a:ea typeface="Georgia" pitchFamily="34" charset="-122"/>
                 <a:cs typeface="Georgia" pitchFamily="34" charset="-120"/>
               </a:rPr>
-              <a:t>– One-sentence exit ticket: </a:t>
-            </a:r>
-            <a:pPr algn="l" indent="0" marL="0">
-              <a:lnSpc>
-                <a:spcPts val="1680"/>
-              </a:lnSpc>
-              <a:spcBef>
-                <a:spcPts val="300"/>
-              </a:spcBef>
-              <a:spcAft>
-                <a:spcPts val="300"/>
-              </a:spcAft>
-              <a:buNone/>
-            </a:pPr>
-            <a:r>
-              <a:rPr lang="en-US" sz="1200" i="1" dirty="0">
-                <a:solidFill>
-                  <a:srgbClr val="1A1A1A"/>
-                </a:solidFill>
-                <a:latin typeface="Georgia" pitchFamily="34" charset="0"/>
-                <a:ea typeface="Georgia" pitchFamily="34" charset="-122"/>
-                <a:cs typeface="Georgia" pitchFamily="34" charset="-120"/>
-              </a:rPr>
-              <a:t>"What's one thing you learned today?"</a:t>
-            </a:r>
-            <a:pPr algn="l" indent="0" marL="0">
-              <a:lnSpc>
-                <a:spcPts val="1680"/>
-              </a:lnSpc>
-              <a:spcBef>
-                <a:spcPts val="300"/>
-              </a:spcBef>
-              <a:spcAft>
-                <a:spcPts val="300"/>
-              </a:spcAft>
-              <a:buNone/>
+              <a:t>2-digit × 11 — much faster.</a:t>
+            </a:r>
+            <a:endParaRPr lang="en-US" sz="1200" dirty="0"/>
+          </a:p>
+          <a:p>
+            <a:pPr algn="l" marL="342900" indent="-342900">
+              <a:lnSpc>
+                <a:spcPts val="1620"/>
+              </a:lnSpc>
+              <a:spcAft>
+                <a:spcPts val="300"/>
+              </a:spcAft>
+              <a:buSzPct val="100000"/>
+              <a:buChar char="•"/>
             </a:pPr>
             <a:r>
               <a:rPr lang="en-US" sz="1200" dirty="0">
@@ -4659,15 +5477,87 @@
                 <a:ea typeface="Georgia" pitchFamily="34" charset="-122"/>
                 <a:cs typeface="Georgia" pitchFamily="34" charset="-120"/>
               </a:rPr>
-              <a:t> – Preview tomorrow.</a:t>
+              <a:t>3-digit × 11 — somewhat faster.</a:t>
             </a:r>
             <a:endParaRPr lang="en-US" sz="1200" dirty="0"/>
           </a:p>
-        </p:txBody>
-      </p:sp>
-      <p:sp>
-        <p:nvSpPr>
-          <p:cNvPr id="5" name="Text 3"/>
+          <a:p>
+            <a:pPr algn="l" marL="342900" indent="-342900">
+              <a:lnSpc>
+                <a:spcPts val="1620"/>
+              </a:lnSpc>
+              <a:spcAft>
+                <a:spcPts val="300"/>
+              </a:spcAft>
+              <a:buSzPct val="100000"/>
+              <a:buChar char="•"/>
+            </a:pPr>
+            <a:r>
+              <a:rPr lang="en-US" sz="1200" dirty="0">
+                <a:solidFill>
+                  <a:srgbClr val="1A1A1A"/>
+                </a:solidFill>
+                <a:latin typeface="Georgia" pitchFamily="34" charset="0"/>
+                <a:ea typeface="Georgia" pitchFamily="34" charset="-122"/>
+                <a:cs typeface="Georgia" pitchFamily="34" charset="-120"/>
+              </a:rPr>
+              <a:t>2-digit × 12–19 — comparable.</a:t>
+            </a:r>
+            <a:endParaRPr lang="en-US" sz="1200" dirty="0"/>
+          </a:p>
+          <a:p>
+            <a:pPr algn="l" marL="342900" indent="-342900">
+              <a:lnSpc>
+                <a:spcPts val="1620"/>
+              </a:lnSpc>
+              <a:spcAft>
+                <a:spcPts val="300"/>
+              </a:spcAft>
+              <a:buSzPct val="100000"/>
+              <a:buChar char="•"/>
+            </a:pPr>
+            <a:r>
+              <a:rPr lang="en-US" sz="1200" dirty="0">
+                <a:solidFill>
+                  <a:srgbClr val="1A1A1A"/>
+                </a:solidFill>
+                <a:latin typeface="Georgia" pitchFamily="34" charset="0"/>
+                <a:ea typeface="Georgia" pitchFamily="34" charset="-122"/>
+                <a:cs typeface="Georgia" pitchFamily="34" charset="-120"/>
+              </a:rPr>
+              <a:t>2-digit × 23 (far from base) — long multiplication is faster.</a:t>
+            </a:r>
+            <a:endParaRPr lang="en-US" sz="1200" dirty="0"/>
+          </a:p>
+          <a:p>
+            <a:pPr algn="l" marL="342900" indent="-342900">
+              <a:lnSpc>
+                <a:spcPts val="1620"/>
+              </a:lnSpc>
+              <a:spcAft>
+                <a:spcPts val="300"/>
+              </a:spcAft>
+              <a:buSzPct val="100000"/>
+              <a:buChar char="•"/>
+            </a:pPr>
+            <a:r>
+              <a:rPr lang="en-US" sz="1200" dirty="0">
+                <a:solidFill>
+                  <a:srgbClr val="1A1A1A"/>
+                </a:solidFill>
+                <a:latin typeface="Georgia" pitchFamily="34" charset="0"/>
+                <a:ea typeface="Georgia" pitchFamily="34" charset="-122"/>
+                <a:cs typeface="Georgia" pitchFamily="34" charset="-120"/>
+              </a:rPr>
+              <a:t>Long multi-digit products — long multiplication or scientific notation is best.</a:t>
+            </a:r>
+            <a:endParaRPr lang="en-US" sz="1200" dirty="0"/>
+          </a:p>
+        </p:txBody>
+      </p:sp>
+      <p:sp>
+        <p:nvSpPr>
+          <p:cNvPr id="6" name="Text 4"/>
           <p:cNvSpPr/>
           <p:nvPr/>
         </p:nvSpPr>
@@ -4817,7 +5707,7 @@
                 <a:ea typeface="Times New Roman" pitchFamily="34" charset="-122"/>
                 <a:cs typeface="Times New Roman" pitchFamily="34" charset="-120"/>
               </a:rPr>
-              <a:t>Homework</a:t>
+              <a:t>Core (20 min) (cont.)</a:t>
             </a:r>
             <a:endParaRPr lang="en-US" sz="1800" dirty="0"/>
           </a:p>
@@ -4831,8 +5721,8 @@
         </p:nvSpPr>
         <p:spPr>
           <a:xfrm>
-            <a:off x="406301" y="870942"/>
-            <a:ext cx="8498026" cy="222796"/>
+            <a:off x="634901" y="883593"/>
+            <a:ext cx="8102798" cy="487561"/>
           </a:xfrm>
           <a:prstGeom prst="rect">
             <a:avLst/>
@@ -4844,13 +5734,31 @@
           <a:bodyPr wrap="square" lIns="0" tIns="0" rIns="0" bIns="0" rtlCol="0" anchor="t"/>
           <a:lstStyle/>
           <a:p>
+            <a:pPr algn="l" marL="342900" indent="-342900">
+              <a:lnSpc>
+                <a:spcPts val="1620"/>
+              </a:lnSpc>
+              <a:spcAft>
+                <a:spcPts val="300"/>
+              </a:spcAft>
+              <a:buSzPct val="100000"/>
+              <a:buChar char="•"/>
+            </a:pPr>
+            <a:r>
+              <a:rPr lang="en-US" sz="1200" b="1" dirty="0">
+                <a:solidFill>
+                  <a:srgbClr val="1A1A1A"/>
+                </a:solidFill>
+                <a:latin typeface="Georgia" pitchFamily="34" charset="0"/>
+                <a:ea typeface="Georgia" pitchFamily="34" charset="-122"/>
+                <a:cs typeface="Georgia" pitchFamily="34" charset="-120"/>
+              </a:rPr>
+              <a:t>Honest framing.</a:t>
+            </a:r>
             <a:pPr algn="l" indent="0" marL="0">
               <a:lnSpc>
-                <a:spcPts val="1680"/>
-              </a:lnSpc>
-              <a:spcBef>
-                <a:spcPts val="300"/>
-              </a:spcBef>
+                <a:spcPts val="1620"/>
+              </a:lnSpc>
               <a:spcAft>
                 <a:spcPts val="300"/>
               </a:spcAft>
@@ -4865,15 +5773,32 @@
                 <a:ea typeface="Georgia" pitchFamily="34" charset="-122"/>
                 <a:cs typeface="Georgia" pitchFamily="34" charset="-120"/>
               </a:rPr>
-              <a:t>(See </a:t>
+              <a:t> Tirthaji's sūtras are not a universal speed-up. They are a </a:t>
             </a:r>
             <a:pPr algn="l" indent="0" marL="0">
               <a:lnSpc>
-                <a:spcPts val="1680"/>
-              </a:lnSpc>
-              <a:spcBef>
-                <a:spcPts val="300"/>
-              </a:spcBef>
+                <a:spcPts val="1620"/>
+              </a:lnSpc>
+              <a:spcAft>
+                <a:spcPts val="300"/>
+              </a:spcAft>
+              <a:buNone/>
+            </a:pPr>
+            <a:r>
+              <a:rPr lang="en-US" sz="1200" i="1" dirty="0">
+                <a:solidFill>
+                  <a:srgbClr val="1A1A1A"/>
+                </a:solidFill>
+                <a:latin typeface="Georgia" pitchFamily="34" charset="0"/>
+                <a:ea typeface="Georgia" pitchFamily="34" charset="-122"/>
+                <a:cs typeface="Georgia" pitchFamily="34" charset="-120"/>
+              </a:rPr>
+              <a:t>toolbox of mental shortcuts for specific patterns</a:t>
+            </a:r>
+            <a:pPr algn="l" indent="0" marL="0">
+              <a:lnSpc>
+                <a:spcPts val="1620"/>
+              </a:lnSpc>
               <a:spcAft>
                 <a:spcPts val="300"/>
               </a:spcAft>
@@ -4888,15 +5813,58 @@
                 <a:ea typeface="Georgia" pitchFamily="34" charset="-122"/>
                 <a:cs typeface="Georgia" pitchFamily="34" charset="-120"/>
               </a:rPr>
-              <a:t>homework.md</a:t>
+              <a:t>. The skill is recognising when to use which tool.</a:t>
+            </a:r>
+            <a:endParaRPr lang="en-US" sz="1200" dirty="0"/>
+          </a:p>
+        </p:txBody>
+      </p:sp>
+      <p:sp>
+        <p:nvSpPr>
+          <p:cNvPr id="5" name="Text 3"/>
+          <p:cNvSpPr/>
+          <p:nvPr/>
+        </p:nvSpPr>
+        <p:spPr>
+          <a:xfrm>
+            <a:off x="634901" y="1472654"/>
+            <a:ext cx="8102798" cy="693241"/>
+          </a:xfrm>
+          <a:prstGeom prst="rect">
+            <a:avLst/>
+          </a:prstGeom>
+          <a:noFill/>
+          <a:ln/>
+        </p:spPr>
+        <p:txBody>
+          <a:bodyPr wrap="square" lIns="0" tIns="0" rIns="0" bIns="0" rtlCol="0" anchor="t"/>
+          <a:lstStyle/>
+          <a:p>
+            <a:pPr algn="l" marL="342900" indent="-342900">
+              <a:lnSpc>
+                <a:spcPts val="1620"/>
+              </a:lnSpc>
+              <a:spcAft>
+                <a:spcPts val="300"/>
+              </a:spcAft>
+              <a:buSzPct val="100000"/>
+              <a:buChar char="•"/>
+            </a:pPr>
+            <a:r>
+              <a:rPr lang="en-US" sz="1200" b="1" dirty="0">
+                <a:solidFill>
+                  <a:srgbClr val="1A1A1A"/>
+                </a:solidFill>
+                <a:latin typeface="Georgia" pitchFamily="34" charset="0"/>
+                <a:ea typeface="Georgia" pitchFamily="34" charset="-122"/>
+                <a:cs typeface="Georgia" pitchFamily="34" charset="-120"/>
+              </a:rPr>
+              <a:t>Reference.</a:t>
             </a:r>
             <a:pPr algn="l" indent="0" marL="0">
               <a:lnSpc>
-                <a:spcPts val="1680"/>
-              </a:lnSpc>
-              <a:spcBef>
-                <a:spcPts val="300"/>
-              </a:spcBef>
+                <a:spcPts val="1620"/>
+              </a:lnSpc>
               <a:spcAft>
                 <a:spcPts val="300"/>
               </a:spcAft>
@@ -4911,7 +5879,87 @@
                 <a:ea typeface="Georgia" pitchFamily="34" charset="-122"/>
                 <a:cs typeface="Georgia" pitchFamily="34" charset="-120"/>
               </a:rPr>
-              <a:t> for today's task.)</a:t>
+              <a:t> Modern mathematicians (S.G. Dani, 1993; Kim Plofker, </a:t>
+            </a:r>
+            <a:pPr algn="l" indent="0" marL="0">
+              <a:lnSpc>
+                <a:spcPts val="1620"/>
+              </a:lnSpc>
+              <a:spcAft>
+                <a:spcPts val="300"/>
+              </a:spcAft>
+              <a:buNone/>
+            </a:pPr>
+            <a:r>
+              <a:rPr lang="en-US" sz="1200" i="1" dirty="0">
+                <a:solidFill>
+                  <a:srgbClr val="1A1A1A"/>
+                </a:solidFill>
+                <a:latin typeface="Georgia" pitchFamily="34" charset="0"/>
+                <a:ea typeface="Georgia" pitchFamily="34" charset="-122"/>
+                <a:cs typeface="Georgia" pitchFamily="34" charset="-120"/>
+              </a:rPr>
+              <a:t>Mathematics in India</a:t>
+            </a:r>
+            <a:pPr algn="l" indent="0" marL="0">
+              <a:lnSpc>
+                <a:spcPts val="1620"/>
+              </a:lnSpc>
+              <a:spcAft>
+                <a:spcPts val="300"/>
+              </a:spcAft>
+              <a:buNone/>
+            </a:pPr>
+            <a:r>
+              <a:rPr lang="en-US" sz="1200" dirty="0">
+                <a:solidFill>
+                  <a:srgbClr val="1A1A1A"/>
+                </a:solidFill>
+                <a:latin typeface="Georgia" pitchFamily="34" charset="0"/>
+                <a:ea typeface="Georgia" pitchFamily="34" charset="-122"/>
+                <a:cs typeface="Georgia" pitchFamily="34" charset="-120"/>
+              </a:rPr>
+              <a:t>, 2009) have written critically about the "Vedic" claim and pedagogically about the methods. Read Dani's </a:t>
+            </a:r>
+            <a:pPr algn="l" indent="0" marL="0">
+              <a:lnSpc>
+                <a:spcPts val="1620"/>
+              </a:lnSpc>
+              <a:spcAft>
+                <a:spcPts val="300"/>
+              </a:spcAft>
+              <a:buNone/>
+            </a:pPr>
+            <a:r>
+              <a:rPr lang="en-US" sz="1200" i="1" dirty="0">
+                <a:solidFill>
+                  <a:srgbClr val="1A1A1A"/>
+                </a:solidFill>
+                <a:latin typeface="Georgia" pitchFamily="34" charset="0"/>
+                <a:ea typeface="Georgia" pitchFamily="34" charset="-122"/>
+                <a:cs typeface="Georgia" pitchFamily="34" charset="-120"/>
+              </a:rPr>
+              <a:t>Frontline</a:t>
+            </a:r>
+            <a:pPr algn="l" indent="0" marL="0">
+              <a:lnSpc>
+                <a:spcPts val="1620"/>
+              </a:lnSpc>
+              <a:spcAft>
+                <a:spcPts val="300"/>
+              </a:spcAft>
+              <a:buNone/>
+            </a:pPr>
+            <a:r>
+              <a:rPr lang="en-US" sz="1200" dirty="0">
+                <a:solidFill>
+                  <a:srgbClr val="1A1A1A"/>
+                </a:solidFill>
+                <a:latin typeface="Georgia" pitchFamily="34" charset="0"/>
+                <a:ea typeface="Georgia" pitchFamily="34" charset="-122"/>
+                <a:cs typeface="Georgia" pitchFamily="34" charset="-120"/>
+              </a:rPr>
+              <a:t> article excerpt aloud (one paragraph).</a:t>
             </a:r>
             <a:endParaRPr lang="en-US" sz="1200" dirty="0"/>
           </a:p>
@@ -4919,7 +5967,7 @@
       </p:sp>
       <p:sp>
         <p:nvSpPr>
-          <p:cNvPr id="5" name="Text 3"/>
+          <p:cNvPr id="6" name="Text 4"/>
           <p:cNvSpPr/>
           <p:nvPr/>
         </p:nvSpPr>
